--- a/ppt/毕业答辩.pptx
+++ b/ppt/毕业答辩.pptx
@@ -6,11 +6,14 @@
     <p:sldMasterId id="2147483661" r:id="rId3"/>
   </p:sldMasterIdLst>
   <p:notesMasterIdLst>
-    <p:notesMasterId r:id="rId21"/>
+    <p:notesMasterId r:id="rId16"/>
   </p:notesMasterIdLst>
+  <p:handoutMasterIdLst>
+    <p:handoutMasterId r:id="rId22"/>
+  </p:handoutMasterIdLst>
   <p:sldIdLst>
     <p:sldId id="258" r:id="rId4"/>
-    <p:sldId id="257" r:id="rId5"/>
+    <p:sldId id="288" r:id="rId5"/>
     <p:sldId id="261" r:id="rId6"/>
     <p:sldId id="262" r:id="rId7"/>
     <p:sldId id="264" r:id="rId8"/>
@@ -21,11 +24,11 @@
     <p:sldId id="267" r:id="rId13"/>
     <p:sldId id="287" r:id="rId14"/>
     <p:sldId id="281" r:id="rId15"/>
-    <p:sldId id="272" r:id="rId16"/>
-    <p:sldId id="269" r:id="rId17"/>
-    <p:sldId id="275" r:id="rId18"/>
-    <p:sldId id="273" r:id="rId19"/>
-    <p:sldId id="285" r:id="rId20"/>
+    <p:sldId id="272" r:id="rId17"/>
+    <p:sldId id="269" r:id="rId18"/>
+    <p:sldId id="275" r:id="rId19"/>
+    <p:sldId id="273" r:id="rId20"/>
+    <p:sldId id="285" r:id="rId21"/>
   </p:sldIdLst>
   <p:sldSz cx="12192000" cy="6858000"/>
   <p:notesSz cx="6858000" cy="9144000"/>
@@ -125,6 +128,164 @@
     </a:lvl9pPr>
   </p:defaultTextStyle>
 </p:presentation>
+</file>
+
+<file path=ppt/handoutMasters/handoutMaster1.xml><?xml version="1.0" encoding="utf-8"?>
+<p:handoutMaster xmlns:a="http://schemas.openxmlformats.org/drawingml/2006/main" xmlns:r="http://schemas.openxmlformats.org/officeDocument/2006/relationships" xmlns:p="http://schemas.openxmlformats.org/presentationml/2006/main">
+  <p:cSld>
+    <p:bg>
+      <p:bgRef idx="1001">
+        <a:schemeClr val="bg1"/>
+      </p:bgRef>
+    </p:bg>
+    <p:spTree>
+      <p:nvGrpSpPr>
+        <p:cNvPr id="1" name=""/>
+        <p:cNvGrpSpPr/>
+        <p:nvPr/>
+      </p:nvGrpSpPr>
+      <p:grpSpPr>
+        <a:xfrm>
+          <a:off x="0" y="0"/>
+          <a:ext cx="0" cy="0"/>
+          <a:chOff x="0" y="0"/>
+          <a:chExt cx="0" cy="0"/>
+        </a:xfrm>
+      </p:grpSpPr>
+      <p:sp>
+        <p:nvSpPr>
+          <p:cNvPr id="2" name="页眉占位符 1"/>
+          <p:cNvSpPr>
+            <a:spLocks noGrp="1"/>
+          </p:cNvSpPr>
+          <p:nvPr>
+            <p:ph type="hdr" sz="quarter"/>
+          </p:nvPr>
+        </p:nvSpPr>
+        <p:spPr>
+          <a:xfrm>
+            <a:off x="0" y="0"/>
+            <a:ext cx="2971800" cy="458788"/>
+          </a:xfrm>
+          <a:prstGeom prst="rect">
+            <a:avLst/>
+          </a:prstGeom>
+        </p:spPr>
+        <p:txBody>
+          <a:bodyPr vert="horz" lIns="91440" tIns="45720" rIns="91440" bIns="45720" rtlCol="0"/>
+          <a:lstStyle>
+            <a:lvl1pPr algn="l">
+              <a:defRPr sz="1200"/>
+            </a:lvl1pPr>
+          </a:lstStyle>
+          <a:p>
+            <a:endParaRPr lang="zh-CN" altLang="en-US"/>
+          </a:p>
+        </p:txBody>
+      </p:sp>
+      <p:sp>
+        <p:nvSpPr>
+          <p:cNvPr id="3" name="日期占位符 2"/>
+          <p:cNvSpPr>
+            <a:spLocks noGrp="1"/>
+          </p:cNvSpPr>
+          <p:nvPr>
+            <p:ph type="dt" sz="quarter" idx="1"/>
+          </p:nvPr>
+        </p:nvSpPr>
+        <p:spPr>
+          <a:xfrm>
+            <a:off x="3884613" y="0"/>
+            <a:ext cx="2971800" cy="458788"/>
+          </a:xfrm>
+          <a:prstGeom prst="rect">
+            <a:avLst/>
+          </a:prstGeom>
+        </p:spPr>
+        <p:txBody>
+          <a:bodyPr vert="horz" lIns="91440" tIns="45720" rIns="91440" bIns="45720" rtlCol="0"/>
+          <a:lstStyle>
+            <a:lvl1pPr algn="r">
+              <a:defRPr sz="1200"/>
+            </a:lvl1pPr>
+          </a:lstStyle>
+          <a:p>
+            <a:fld id="{0F9B84EA-7D68-4D60-9CB1-D50884785D1C}" type="datetimeFigureOut">
+              <a:rPr lang="zh-CN" altLang="en-US" smtClean="0"/>
+            </a:fld>
+            <a:endParaRPr lang="zh-CN" altLang="en-US"/>
+          </a:p>
+        </p:txBody>
+      </p:sp>
+      <p:sp>
+        <p:nvSpPr>
+          <p:cNvPr id="4" name="页脚占位符 3"/>
+          <p:cNvSpPr>
+            <a:spLocks noGrp="1"/>
+          </p:cNvSpPr>
+          <p:nvPr>
+            <p:ph type="ftr" sz="quarter" idx="2"/>
+          </p:nvPr>
+        </p:nvSpPr>
+        <p:spPr>
+          <a:xfrm>
+            <a:off x="0" y="8685213"/>
+            <a:ext cx="2971800" cy="458787"/>
+          </a:xfrm>
+          <a:prstGeom prst="rect">
+            <a:avLst/>
+          </a:prstGeom>
+        </p:spPr>
+        <p:txBody>
+          <a:bodyPr vert="horz" lIns="91440" tIns="45720" rIns="91440" bIns="45720" rtlCol="0" anchor="b"/>
+          <a:lstStyle>
+            <a:lvl1pPr algn="l">
+              <a:defRPr sz="1200"/>
+            </a:lvl1pPr>
+          </a:lstStyle>
+          <a:p>
+            <a:endParaRPr lang="zh-CN" altLang="en-US"/>
+          </a:p>
+        </p:txBody>
+      </p:sp>
+      <p:sp>
+        <p:nvSpPr>
+          <p:cNvPr id="5" name="灯片编号占位符 4"/>
+          <p:cNvSpPr>
+            <a:spLocks noGrp="1"/>
+          </p:cNvSpPr>
+          <p:nvPr>
+            <p:ph type="sldNum" sz="quarter" idx="3"/>
+          </p:nvPr>
+        </p:nvSpPr>
+        <p:spPr>
+          <a:xfrm>
+            <a:off x="3884613" y="8685213"/>
+            <a:ext cx="2971800" cy="458787"/>
+          </a:xfrm>
+          <a:prstGeom prst="rect">
+            <a:avLst/>
+          </a:prstGeom>
+        </p:spPr>
+        <p:txBody>
+          <a:bodyPr vert="horz" lIns="91440" tIns="45720" rIns="91440" bIns="45720" rtlCol="0" anchor="b"/>
+          <a:lstStyle>
+            <a:lvl1pPr algn="r">
+              <a:defRPr sz="1200"/>
+            </a:lvl1pPr>
+          </a:lstStyle>
+          <a:p>
+            <a:fld id="{8D4E0FC9-F1F8-4FAE-9988-3BA365CFD46F}" type="slidenum">
+              <a:rPr lang="zh-CN" altLang="en-US" smtClean="0"/>
+            </a:fld>
+            <a:endParaRPr lang="zh-CN" altLang="en-US"/>
+          </a:p>
+        </p:txBody>
+      </p:sp>
+    </p:spTree>
+  </p:cSld>
+  <p:clrMap bg1="lt1" tx1="dk1" bg2="lt2" tx2="dk2" accent1="accent1" accent2="accent2" accent3="accent3" accent4="accent4" accent5="accent5" accent6="accent6" hlink="hlink" folHlink="folHlink"/>
+</p:handoutMaster>
 </file>
 
 <file path=ppt/notesMasters/notesMaster1.xml><?xml version="1.0" encoding="utf-8"?>
@@ -472,6 +633,54 @@
     </a:lvl9pPr>
   </p:notesStyle>
 </p:notesMaster>
+</file>
+
+<file path=ppt/notesSlides/notesSlide1.xml><?xml version="1.0" encoding="utf-8"?>
+<p:notes xmlns:a="http://schemas.openxmlformats.org/drawingml/2006/main" xmlns:r="http://schemas.openxmlformats.org/officeDocument/2006/relationships" xmlns:p="http://schemas.openxmlformats.org/presentationml/2006/main">
+  <p:cSld>
+    <p:spTree>
+      <p:nvGrpSpPr>
+        <p:cNvPr id="1" name=""/>
+        <p:cNvGrpSpPr/>
+        <p:nvPr/>
+      </p:nvGrpSpPr>
+      <p:grpSpPr/>
+      <p:sp>
+        <p:nvSpPr>
+          <p:cNvPr id="2" name="幻灯片图像占位符 1"/>
+          <p:cNvSpPr>
+            <a:spLocks noGrp="1"/>
+          </p:cNvSpPr>
+          <p:nvPr>
+            <p:ph type="sldImg" idx="2"/>
+          </p:nvPr>
+        </p:nvSpPr>
+        <p:spPr/>
+      </p:sp>
+      <p:sp>
+        <p:nvSpPr>
+          <p:cNvPr id="3" name="文本占位符 2"/>
+          <p:cNvSpPr>
+            <a:spLocks noGrp="1"/>
+          </p:cNvSpPr>
+          <p:nvPr>
+            <p:ph type="body" idx="3"/>
+          </p:nvPr>
+        </p:nvSpPr>
+        <p:spPr/>
+        <p:txBody>
+          <a:bodyPr/>
+          <a:p>
+            <a:endParaRPr lang="zh-CN" altLang="en-US"/>
+          </a:p>
+        </p:txBody>
+      </p:sp>
+    </p:spTree>
+  </p:cSld>
+  <p:clrMapOvr>
+    <a:masterClrMapping/>
+  </p:clrMapOvr>
+</p:notes>
 </file>
 
 <file path=ppt/slideLayouts/slideLayout1.xml><?xml version="1.0" encoding="utf-8"?>
@@ -1230,16 +1439,6 @@
                 <a:ea typeface="微软雅黑" panose="020B0503020204020204" pitchFamily="34" charset="-122"/>
               </a:rPr>
               <a:t> </a:t>
-            </a:r>
-            <a:r>
-              <a:rPr lang="en-US" altLang="zh-CN" sz="100" dirty="0">
-                <a:solidFill>
-                  <a:prstClr val="black"/>
-                </a:solidFill>
-                <a:latin typeface="微软雅黑" panose="020B0503020204020204" pitchFamily="34" charset="-122"/>
-                <a:ea typeface="微软雅黑" panose="020B0503020204020204" pitchFamily="34" charset="-122"/>
-              </a:rPr>
-              <a:t>http://www.1ppt.com/xiazai/</a:t>
             </a:r>
             <a:endParaRPr lang="en-US" altLang="zh-CN" sz="100" dirty="0">
               <a:solidFill>
@@ -4656,7 +4855,18 @@
                 <a:ea typeface="思源宋体 CN Heavy" panose="02020900000000000000" pitchFamily="18" charset="-122"/>
                 <a:cs typeface="阿里巴巴普惠体 H" panose="00020600040101010101" pitchFamily="18" charset="-122"/>
               </a:rPr>
-              <a:t>基于多智能体协同的软件需求变更管理与可追溯平台设计与实现</a:t>
+              <a:t>基于需求</a:t>
+            </a:r>
+            <a:r>
+              <a:rPr lang="zh-CN" altLang="en-US" sz="4800" spc="200" dirty="0">
+                <a:solidFill>
+                  <a:schemeClr val="tx1"/>
+                </a:solidFill>
+                <a:latin typeface="思源宋体 CN Heavy" panose="02020900000000000000" pitchFamily="18" charset="-122"/>
+                <a:ea typeface="思源宋体 CN Heavy" panose="02020900000000000000" pitchFamily="18" charset="-122"/>
+                <a:cs typeface="阿里巴巴普惠体 H" panose="00020600040101010101" pitchFamily="18" charset="-122"/>
+              </a:rPr>
+              <a:t>文档的软件需求变更管理与可追溯平台设计与实现</a:t>
             </a:r>
             <a:endParaRPr lang="zh-CN" altLang="en-US" sz="4800" spc="200" dirty="0">
               <a:solidFill>
@@ -4907,7 +5117,7 @@
               <a:defRPr/>
             </a:pPr>
             <a:r>
-              <a:rPr lang="en-US" i="1">
+              <a:rPr lang="en-US" altLang="zh-CN" i="1">
                 <a:solidFill>
                   <a:schemeClr val="tx1">
                     <a:alpha val="85098"/>
@@ -4918,9 +5128,9 @@
                 <a:cs typeface="Noto Sans SC" panose="020B0200000000000000" charset="-122"/>
                 <a:sym typeface="Noto Sans SC" panose="020B0200000000000000" charset="-122"/>
               </a:rPr>
-              <a:t>Design and Implementation of a Multi-Agent Collaborative Platform for Software Requirement Change Management and Traceability</a:t>
+              <a:t>Design and Implementation of a Software Requirement Change Management and Traceability Platform Based on Requirement Documents</a:t>
             </a:r>
-            <a:endParaRPr lang="en-US" altLang="en-US" i="1">
+            <a:endParaRPr lang="en-US" altLang="zh-CN" i="1">
               <a:solidFill>
                 <a:schemeClr val="tx1">
                   <a:alpha val="85098"/>
@@ -5400,6 +5610,17 @@
                   <a:cs typeface="Noto Sans SC" panose="020B0200000000000000" charset="-122"/>
                 </a:rPr>
                 <a:t>基于 FastAPI 实现接口路由和业务处理，完成文档解析、规则提取、版本记录、评估和导出</a:t>
+              </a:r>
+              <a:r>
+                <a:rPr lang="zh-CN" altLang="en-US" sz="1400">
+                  <a:solidFill>
+                    <a:srgbClr val="4B5563"/>
+                  </a:solidFill>
+                  <a:latin typeface="Noto Sans SC" panose="020B0200000000000000" charset="-122"/>
+                  <a:ea typeface="Noto Sans SC" panose="020B0200000000000000" charset="-122"/>
+                  <a:cs typeface="Noto Sans SC" panose="020B0200000000000000" charset="-122"/>
+                </a:rPr>
+                <a:t>等功能</a:t>
               </a:r>
               <a:endParaRPr lang="zh-CN" altLang="en-US" sz="1400">
                 <a:solidFill>
@@ -5725,9 +5946,9 @@
         <p:grpSpPr>
           <a:xfrm>
             <a:off x="1005205" y="3495653"/>
-            <a:ext cx="2827020" cy="1576737"/>
+            <a:ext cx="2827020" cy="1899952"/>
             <a:chOff x="782561" y="3965241"/>
-            <a:chExt cx="2827332" cy="1101300"/>
+            <a:chExt cx="2827332" cy="1327055"/>
           </a:xfrm>
         </p:grpSpPr>
         <p:sp>
@@ -5743,7 +5964,7 @@
           <p:spPr>
             <a:xfrm>
               <a:off x="782561" y="4339600"/>
-              <a:ext cx="2827332" cy="726941"/>
+              <a:ext cx="2827332" cy="952696"/>
             </a:xfrm>
             <a:prstGeom prst="rect">
               <a:avLst/>
@@ -5785,7 +6006,62 @@
                   <a:ea typeface="Noto Sans SC" panose="020B0200000000000000" charset="-122"/>
                   <a:cs typeface="Noto Sans SC" panose="020B0200000000000000" charset="-122"/>
                 </a:rPr>
-                <a:t>基于 Jinja2 与 Bootstrap 构建页面，提供需求管理、追溯维护、影响图和AI评估等入口</a:t>
+                <a:t>采用</a:t>
+              </a:r>
+              <a:r>
+                <a:rPr lang="en-US" altLang="zh-CN" sz="1400">
+                  <a:solidFill>
+                    <a:srgbClr val="4B5563"/>
+                  </a:solidFill>
+                  <a:latin typeface="Noto Sans SC" panose="020B0200000000000000" charset="-122"/>
+                  <a:ea typeface="Noto Sans SC" panose="020B0200000000000000" charset="-122"/>
+                  <a:cs typeface="Noto Sans SC" panose="020B0200000000000000" charset="-122"/>
+                </a:rPr>
+                <a:t>Jinja2+Bootstrap+JavaScript </a:t>
+              </a:r>
+              <a:r>
+                <a:rPr lang="zh-CN" altLang="en-US" sz="1400">
+                  <a:solidFill>
+                    <a:srgbClr val="4B5563"/>
+                  </a:solidFill>
+                  <a:latin typeface="Noto Sans SC" panose="020B0200000000000000" charset="-122"/>
+                  <a:ea typeface="Noto Sans SC" panose="020B0200000000000000" charset="-122"/>
+                  <a:cs typeface="Noto Sans SC" panose="020B0200000000000000" charset="-122"/>
+                </a:rPr>
+                <a:t>实现页面渲染、样式布局和前端动态交互，支持需求管理、追溯维护、关系图展示、</a:t>
+              </a:r>
+              <a:r>
+                <a:rPr lang="en-US" altLang="zh-CN" sz="1400">
+                  <a:solidFill>
+                    <a:srgbClr val="4B5563"/>
+                  </a:solidFill>
+                  <a:latin typeface="Noto Sans SC" panose="020B0200000000000000" charset="-122"/>
+                  <a:ea typeface="Noto Sans SC" panose="020B0200000000000000" charset="-122"/>
+                  <a:cs typeface="Noto Sans SC" panose="020B0200000000000000" charset="-122"/>
+                </a:rPr>
+                <a:t>AI</a:t>
+              </a:r>
+              <a:r>
+                <a:rPr lang="zh-CN" altLang="en-US" sz="1400">
+                  <a:solidFill>
+                    <a:srgbClr val="4B5563"/>
+                  </a:solidFill>
+                  <a:latin typeface="Noto Sans SC" panose="020B0200000000000000" charset="-122"/>
+                  <a:ea typeface="Noto Sans SC" panose="020B0200000000000000" charset="-122"/>
+                  <a:cs typeface="Noto Sans SC" panose="020B0200000000000000" charset="-122"/>
+                </a:rPr>
+                <a:t>评估和文档导出</a:t>
+              </a:r>
+              <a:r>
+                <a:rPr lang="zh-CN" altLang="en-US" sz="1400">
+                  <a:solidFill>
+                    <a:srgbClr val="4B5563"/>
+                  </a:solidFill>
+                  <a:latin typeface="Noto Sans SC" panose="020B0200000000000000" charset="-122"/>
+                  <a:ea typeface="Noto Sans SC" panose="020B0200000000000000" charset="-122"/>
+                  <a:cs typeface="Noto Sans SC" panose="020B0200000000000000" charset="-122"/>
+                </a:rPr>
+                <a:t>等</a:t>
               </a:r>
               <a:endParaRPr lang="zh-CN" altLang="en-US" sz="1400">
                 <a:solidFill>
@@ -9703,7 +9979,7 @@
         <p:spPr>
           <a:xfrm>
             <a:off x="425450" y="107315"/>
-            <a:ext cx="5113655" cy="307340"/>
+            <a:ext cx="5293360" cy="307340"/>
           </a:xfrm>
           <a:prstGeom prst="rect">
             <a:avLst/>
@@ -9717,17 +9993,6 @@
           <a:lstStyle/>
           <a:p>
             <a:r>
-              <a:rPr lang="en-US" altLang="zh-CN" sz="2000" dirty="0">
-                <a:solidFill>
-                  <a:schemeClr val="accent4"/>
-                </a:solidFill>
-                <a:latin typeface="思源宋体 CN Heavy" panose="02020900000000000000" pitchFamily="18" charset="-122"/>
-                <a:ea typeface="思源宋体 CN Heavy" panose="02020900000000000000" pitchFamily="18" charset="-122"/>
-                <a:cs typeface="阿里巴巴普惠体 R" panose="00020600040101010101" pitchFamily="18" charset="-122"/>
-              </a:rPr>
-              <a:t>03</a:t>
-            </a:r>
-            <a:r>
               <a:rPr lang="zh-CN" altLang="en-US" sz="2000" dirty="0">
                 <a:solidFill>
                   <a:schemeClr val="accent4"/>
@@ -9737,43 +10002,7 @@
                 <a:cs typeface="阿里巴巴普惠体 R" panose="00020600040101010101" pitchFamily="18" charset="-122"/>
                 <a:sym typeface="+mn-ea"/>
               </a:rPr>
-              <a:t>系统设计与实现</a:t>
-            </a:r>
-            <a:r>
-              <a:rPr lang="en-US" altLang="zh-CN" sz="2000" dirty="0">
-                <a:solidFill>
-                  <a:schemeClr val="accent4"/>
-                </a:solidFill>
-                <a:latin typeface="思源宋体 CN Heavy" panose="02020900000000000000" pitchFamily="18" charset="-122"/>
-                <a:ea typeface="思源宋体 CN Heavy" panose="02020900000000000000" pitchFamily="18" charset="-122"/>
-                <a:cs typeface="阿里巴巴普惠体 R" panose="00020600040101010101" pitchFamily="18" charset="-122"/>
-                <a:sym typeface="+mn-ea"/>
-              </a:rPr>
-              <a:t>—</a:t>
-            </a:r>
-            <a:r>
-              <a:rPr lang="zh-CN" altLang="en-US" sz="2000" dirty="0">
-                <a:solidFill>
-                  <a:schemeClr val="accent4"/>
-                </a:solidFill>
-                <a:latin typeface="思源宋体 CN Heavy" panose="02020900000000000000" pitchFamily="18" charset="-122"/>
-                <a:ea typeface="思源宋体 CN Heavy" panose="02020900000000000000" pitchFamily="18" charset="-122"/>
-                <a:cs typeface="阿里巴巴普惠体 R" panose="00020600040101010101" pitchFamily="18" charset="-122"/>
-                <a:sym typeface="+mn-ea"/>
-              </a:rPr>
-              <a:t>多智能体协同处理</a:t>
-            </a:r>
-            <a:r>
-              <a:rPr lang="zh-CN" altLang="en-US" sz="2000" dirty="0">
-                <a:solidFill>
-                  <a:schemeClr val="accent4"/>
-                </a:solidFill>
-                <a:latin typeface="思源宋体 CN Heavy" panose="02020900000000000000" pitchFamily="18" charset="-122"/>
-                <a:ea typeface="思源宋体 CN Heavy" panose="02020900000000000000" pitchFamily="18" charset="-122"/>
-                <a:cs typeface="阿里巴巴普惠体 R" panose="00020600040101010101" pitchFamily="18" charset="-122"/>
-                <a:sym typeface="+mn-ea"/>
-              </a:rPr>
-              <a:t>流程</a:t>
+              <a:t>03系统设计与实现—基于职责划分的处理流程</a:t>
             </a:r>
             <a:endParaRPr lang="zh-CN" altLang="en-US" sz="2000" dirty="0">
               <a:solidFill>
@@ -10846,7 +11075,7 @@
                     <a:ea typeface="思源宋体 Medium" panose="02020500000000000000" pitchFamily="18" charset="-122"/>
                     <a:cs typeface="阿里巴巴普惠体 B" panose="00020600040101010101" pitchFamily="18" charset="-122"/>
                   </a:rPr>
-                  <a:t>来源证据与影响波及图</a:t>
+                  <a:t>来源证据与追溯关系图</a:t>
                 </a:r>
                 <a:endParaRPr lang="zh-CN" altLang="en-US" sz="2000" b="1" dirty="0">
                   <a:solidFill>
@@ -14363,7 +14592,7 @@
         <p:spPr>
           <a:xfrm flipH="1">
             <a:off x="4923790" y="4942205"/>
-            <a:ext cx="2350135" cy="969010"/>
+            <a:ext cx="2350135" cy="1292225"/>
           </a:xfrm>
           <a:prstGeom prst="rect">
             <a:avLst/>
@@ -14406,7 +14635,7 @@
                 <a:ea typeface="Noto Sans SC" panose="020B0200000000000000" charset="-122"/>
                 <a:cs typeface="Noto Sans SC" panose="020B0200000000000000" charset="-122"/>
               </a:rPr>
-              <a:t>成功基于 MySQL 中的文档、需求点和版本数据生成图谱，展示需求来源与版本演化关系</a:t>
+              <a:t>成功基于 MySQL 中的文档、需求点和版本数据生成需求变更追溯关系图，展示需求来源与版本演化关系</a:t>
             </a:r>
             <a:endParaRPr kumimoji="0" lang="zh-CN" altLang="en-US" sz="1400" b="0" i="0" u="none" strike="noStrike" kern="1200" cap="none" spc="0" normalizeH="0" baseline="0">
               <a:solidFill>
@@ -14431,8 +14660,8 @@
         </p:nvSpPr>
         <p:spPr>
           <a:xfrm flipH="1">
-            <a:off x="5427445" y="4217528"/>
-            <a:ext cx="1340286" cy="384175"/>
+            <a:off x="5427445" y="4101958"/>
+            <a:ext cx="1340286" cy="615315"/>
           </a:xfrm>
           <a:prstGeom prst="rect">
             <a:avLst/>
@@ -14447,7 +14676,7 @@
           <a:p>
             <a:pPr indent="0" algn="ctr">
               <a:lnSpc>
-                <a:spcPct val="125000"/>
+                <a:spcPct val="100000"/>
               </a:lnSpc>
               <a:defRPr/>
             </a:pPr>
@@ -14460,7 +14689,7 @@
                 <a:ea typeface="思源宋体 Medium" panose="02020500000000000000" pitchFamily="18" charset="-122"/>
                 <a:cs typeface="阿里巴巴普惠体 B" panose="00020600040101010101" pitchFamily="18" charset="-122"/>
               </a:rPr>
-              <a:t>影响波及图</a:t>
+              <a:t>需求变更追溯关系图</a:t>
             </a:r>
             <a:endParaRPr lang="zh-CN" altLang="en-US" sz="2000" b="1" dirty="0">
               <a:solidFill>
@@ -14690,6 +14919,60 @@
           <a:chExt cx="0" cy="0"/>
         </a:xfrm>
       </p:grpSpPr>
+      <p:sp>
+        <p:nvSpPr>
+          <p:cNvPr id="60" name="矩形: 圆角 39"/>
+          <p:cNvSpPr/>
+          <p:nvPr>
+            <p:custDataLst>
+              <p:tags r:id="rId1"/>
+            </p:custDataLst>
+          </p:nvPr>
+        </p:nvSpPr>
+        <p:spPr>
+          <a:xfrm>
+            <a:off x="6737350" y="2186305"/>
+            <a:ext cx="501650" cy="2921635"/>
+          </a:xfrm>
+          <a:prstGeom prst="roundRect">
+            <a:avLst>
+              <a:gd name="adj" fmla="val 10526"/>
+            </a:avLst>
+          </a:prstGeom>
+          <a:solidFill>
+            <a:schemeClr val="bg2"/>
+          </a:solidFill>
+          <a:ln>
+            <a:solidFill>
+              <a:schemeClr val="accent1"/>
+            </a:solidFill>
+          </a:ln>
+        </p:spPr>
+        <p:style>
+          <a:lnRef idx="2">
+            <a:schemeClr val="accent1">
+              <a:shade val="15000"/>
+            </a:schemeClr>
+          </a:lnRef>
+          <a:fillRef idx="1">
+            <a:schemeClr val="accent1"/>
+          </a:fillRef>
+          <a:effectRef idx="0">
+            <a:schemeClr val="accent1"/>
+          </a:effectRef>
+          <a:fontRef idx="minor">
+            <a:schemeClr val="lt1"/>
+          </a:fontRef>
+        </p:style>
+        <p:txBody>
+          <a:bodyPr rtlCol="0" anchor="ctr"/>
+          <a:lstStyle/>
+          <a:p>
+            <a:pPr algn="ctr"/>
+            <a:endParaRPr lang="zh-CN" altLang="en-US"/>
+          </a:p>
+        </p:txBody>
+      </p:sp>
       <p:grpSp>
         <p:nvGrpSpPr>
           <p:cNvPr id="27" name="组合 26"/>
@@ -14994,397 +15277,17 @@
       </p:grpSp>
       <p:grpSp>
         <p:nvGrpSpPr>
-          <p:cNvPr id="2" name="组合 1"/>
+          <p:cNvPr id="11" name="组合 10"/>
           <p:cNvGrpSpPr/>
           <p:nvPr>
             <p:custDataLst>
-              <p:tags r:id="rId1"/>
+              <p:tags r:id="rId2"/>
             </p:custDataLst>
           </p:nvPr>
         </p:nvGrpSpPr>
         <p:grpSpPr>
           <a:xfrm>
-            <a:off x="1166555" y="4293179"/>
-            <a:ext cx="3368869" cy="1741237"/>
-            <a:chOff x="1166555" y="4293179"/>
-            <a:chExt cx="3368869" cy="1741237"/>
-          </a:xfrm>
-        </p:grpSpPr>
-        <p:sp>
-          <p:nvSpPr>
-            <p:cNvPr id="3" name="椭圆 2"/>
-            <p:cNvSpPr/>
-            <p:nvPr/>
-          </p:nvSpPr>
-          <p:spPr>
-            <a:xfrm>
-              <a:off x="1166555" y="4293179"/>
-              <a:ext cx="1741237" cy="1741237"/>
-            </a:xfrm>
-            <a:prstGeom prst="ellipse">
-              <a:avLst/>
-            </a:prstGeom>
-            <a:solidFill>
-              <a:schemeClr val="accent1">
-                <a:lumMod val="60000"/>
-                <a:lumOff val="40000"/>
-              </a:schemeClr>
-            </a:solidFill>
-            <a:ln>
-              <a:noFill/>
-            </a:ln>
-            <a:effectLst/>
-          </p:spPr>
-          <p:style>
-            <a:lnRef idx="2">
-              <a:schemeClr val="accent1">
-                <a:shade val="15000"/>
-              </a:schemeClr>
-            </a:lnRef>
-            <a:fillRef idx="1">
-              <a:schemeClr val="accent1"/>
-            </a:fillRef>
-            <a:effectRef idx="0">
-              <a:schemeClr val="accent1"/>
-            </a:effectRef>
-            <a:fontRef idx="minor">
-              <a:schemeClr val="lt1"/>
-            </a:fontRef>
-          </p:style>
-          <p:txBody>
-            <a:bodyPr rtlCol="0" anchor="ctr"/>
-            <a:lstStyle/>
-            <a:p>
-              <a:pPr algn="ctr"/>
-              <a:r>
-                <a:rPr lang="en-US" altLang="zh-CN" sz="2400" b="1" dirty="0">
-                  <a:solidFill>
-                    <a:schemeClr val="bg2"/>
-                  </a:solidFill>
-                  <a:latin typeface="思源宋体 Medium" panose="02020500000000000000" pitchFamily="18" charset="-122"/>
-                  <a:ea typeface="思源宋体 Medium" panose="02020500000000000000" pitchFamily="18" charset="-122"/>
-                  <a:cs typeface="阿里巴巴普惠体 B" panose="00020600040101010101" pitchFamily="18" charset="-122"/>
-                </a:rPr>
-                <a:t>03</a:t>
-              </a:r>
-              <a:endParaRPr lang="zh-CN" altLang="en-US" sz="2400" b="1" dirty="0">
-                <a:solidFill>
-                  <a:schemeClr val="bg2"/>
-                </a:solidFill>
-                <a:latin typeface="思源宋体 Medium" panose="02020500000000000000" pitchFamily="18" charset="-122"/>
-                <a:ea typeface="思源宋体 Medium" panose="02020500000000000000" pitchFamily="18" charset="-122"/>
-                <a:cs typeface="阿里巴巴普惠体 B" panose="00020600040101010101" pitchFamily="18" charset="-122"/>
-              </a:endParaRPr>
-            </a:p>
-          </p:txBody>
-        </p:sp>
-        <p:cxnSp>
-          <p:nvCxnSpPr>
-            <p:cNvPr id="4" name="直接连接符 3"/>
-            <p:cNvCxnSpPr/>
-            <p:nvPr>
-              <p:custDataLst>
-                <p:tags r:id="rId2"/>
-              </p:custDataLst>
-            </p:nvPr>
-          </p:nvCxnSpPr>
-          <p:spPr>
-            <a:xfrm flipV="1">
-              <a:off x="2907792" y="5171615"/>
-              <a:ext cx="1627632" cy="1"/>
-            </a:xfrm>
-            <a:prstGeom prst="line">
-              <a:avLst/>
-            </a:prstGeom>
-            <a:ln>
-              <a:solidFill>
-                <a:schemeClr val="accent1"/>
-              </a:solidFill>
-              <a:tailEnd type="oval"/>
-            </a:ln>
-          </p:spPr>
-          <p:style>
-            <a:lnRef idx="2">
-              <a:schemeClr val="accent1"/>
-            </a:lnRef>
-            <a:fillRef idx="0">
-              <a:schemeClr val="accent1"/>
-            </a:fillRef>
-            <a:effectRef idx="1">
-              <a:schemeClr val="accent1"/>
-            </a:effectRef>
-            <a:fontRef idx="minor">
-              <a:schemeClr val="tx1"/>
-            </a:fontRef>
-          </p:style>
-        </p:cxnSp>
-      </p:grpSp>
-      <p:grpSp>
-        <p:nvGrpSpPr>
-          <p:cNvPr id="5" name="组合 4"/>
-          <p:cNvGrpSpPr/>
-          <p:nvPr>
-            <p:custDataLst>
-              <p:tags r:id="rId3"/>
-            </p:custDataLst>
-          </p:nvPr>
-        </p:nvGrpSpPr>
-        <p:grpSpPr>
-          <a:xfrm>
-            <a:off x="1166555" y="1423532"/>
-            <a:ext cx="3368869" cy="1741237"/>
-            <a:chOff x="1166555" y="1423532"/>
-            <a:chExt cx="3368869" cy="1741237"/>
-          </a:xfrm>
-        </p:grpSpPr>
-        <p:sp>
-          <p:nvSpPr>
-            <p:cNvPr id="6" name="椭圆 5"/>
-            <p:cNvSpPr/>
-            <p:nvPr/>
-          </p:nvSpPr>
-          <p:spPr>
-            <a:xfrm>
-              <a:off x="1166555" y="1423532"/>
-              <a:ext cx="1741237" cy="1741237"/>
-            </a:xfrm>
-            <a:prstGeom prst="ellipse">
-              <a:avLst/>
-            </a:prstGeom>
-            <a:solidFill>
-              <a:schemeClr val="accent1">
-                <a:lumMod val="60000"/>
-                <a:lumOff val="40000"/>
-              </a:schemeClr>
-            </a:solidFill>
-            <a:ln>
-              <a:noFill/>
-            </a:ln>
-            <a:effectLst/>
-          </p:spPr>
-          <p:style>
-            <a:lnRef idx="2">
-              <a:schemeClr val="accent1">
-                <a:shade val="15000"/>
-              </a:schemeClr>
-            </a:lnRef>
-            <a:fillRef idx="1">
-              <a:schemeClr val="accent1"/>
-            </a:fillRef>
-            <a:effectRef idx="0">
-              <a:schemeClr val="accent1"/>
-            </a:effectRef>
-            <a:fontRef idx="minor">
-              <a:schemeClr val="lt1"/>
-            </a:fontRef>
-          </p:style>
-          <p:txBody>
-            <a:bodyPr rtlCol="0" anchor="ctr"/>
-            <a:lstStyle/>
-            <a:p>
-              <a:pPr algn="ctr"/>
-              <a:r>
-                <a:rPr lang="en-US" altLang="zh-CN" sz="2400" b="1" dirty="0">
-                  <a:solidFill>
-                    <a:schemeClr val="bg2"/>
-                  </a:solidFill>
-                  <a:latin typeface="思源宋体 Medium" panose="02020500000000000000" pitchFamily="18" charset="-122"/>
-                  <a:ea typeface="思源宋体 Medium" panose="02020500000000000000" pitchFamily="18" charset="-122"/>
-                  <a:cs typeface="阿里巴巴普惠体 B" panose="00020600040101010101" pitchFamily="18" charset="-122"/>
-                </a:rPr>
-                <a:t>01</a:t>
-              </a:r>
-              <a:endParaRPr lang="zh-CN" altLang="en-US" sz="2400" b="1" dirty="0">
-                <a:solidFill>
-                  <a:schemeClr val="bg2"/>
-                </a:solidFill>
-                <a:latin typeface="思源宋体 Medium" panose="02020500000000000000" pitchFamily="18" charset="-122"/>
-                <a:ea typeface="思源宋体 Medium" panose="02020500000000000000" pitchFamily="18" charset="-122"/>
-                <a:cs typeface="阿里巴巴普惠体 B" panose="00020600040101010101" pitchFamily="18" charset="-122"/>
-              </a:endParaRPr>
-            </a:p>
-          </p:txBody>
-        </p:sp>
-        <p:cxnSp>
-          <p:nvCxnSpPr>
-            <p:cNvPr id="7" name="直接连接符 6"/>
-            <p:cNvCxnSpPr>
-              <a:stCxn id="6" idx="6"/>
-            </p:cNvCxnSpPr>
-            <p:nvPr>
-              <p:custDataLst>
-                <p:tags r:id="rId4"/>
-              </p:custDataLst>
-            </p:nvPr>
-          </p:nvCxnSpPr>
-          <p:spPr>
-            <a:xfrm flipV="1">
-              <a:off x="2907792" y="2294150"/>
-              <a:ext cx="1627632" cy="1"/>
-            </a:xfrm>
-            <a:prstGeom prst="line">
-              <a:avLst/>
-            </a:prstGeom>
-            <a:ln>
-              <a:solidFill>
-                <a:schemeClr val="accent1"/>
-              </a:solidFill>
-              <a:tailEnd type="oval"/>
-            </a:ln>
-          </p:spPr>
-          <p:style>
-            <a:lnRef idx="2">
-              <a:schemeClr val="accent1"/>
-            </a:lnRef>
-            <a:fillRef idx="0">
-              <a:schemeClr val="accent1"/>
-            </a:fillRef>
-            <a:effectRef idx="1">
-              <a:schemeClr val="accent1"/>
-            </a:effectRef>
-            <a:fontRef idx="minor">
-              <a:schemeClr val="tx1"/>
-            </a:fontRef>
-          </p:style>
-        </p:cxnSp>
-      </p:grpSp>
-      <p:grpSp>
-        <p:nvGrpSpPr>
-          <p:cNvPr id="8" name="组合 7"/>
-          <p:cNvGrpSpPr/>
-          <p:nvPr>
-            <p:custDataLst>
-              <p:tags r:id="rId5"/>
-            </p:custDataLst>
-          </p:nvPr>
-        </p:nvGrpSpPr>
-        <p:grpSpPr>
-          <a:xfrm>
-            <a:off x="1166555" y="2858356"/>
-            <a:ext cx="3370699" cy="1741237"/>
-            <a:chOff x="1166555" y="2858356"/>
-            <a:chExt cx="3370699" cy="1741237"/>
-          </a:xfrm>
-        </p:grpSpPr>
-        <p:sp>
-          <p:nvSpPr>
-            <p:cNvPr id="9" name="椭圆 8"/>
-            <p:cNvSpPr/>
-            <p:nvPr/>
-          </p:nvSpPr>
-          <p:spPr>
-            <a:xfrm>
-              <a:off x="1166555" y="2858356"/>
-              <a:ext cx="1741237" cy="1741237"/>
-            </a:xfrm>
-            <a:prstGeom prst="ellipse">
-              <a:avLst/>
-            </a:prstGeom>
-            <a:solidFill>
-              <a:schemeClr val="accent1"/>
-            </a:solidFill>
-            <a:ln>
-              <a:noFill/>
-            </a:ln>
-            <a:effectLst/>
-          </p:spPr>
-          <p:style>
-            <a:lnRef idx="2">
-              <a:schemeClr val="accent1">
-                <a:shade val="15000"/>
-              </a:schemeClr>
-            </a:lnRef>
-            <a:fillRef idx="1">
-              <a:schemeClr val="accent1"/>
-            </a:fillRef>
-            <a:effectRef idx="0">
-              <a:schemeClr val="accent1"/>
-            </a:effectRef>
-            <a:fontRef idx="minor">
-              <a:schemeClr val="lt1"/>
-            </a:fontRef>
-          </p:style>
-          <p:txBody>
-            <a:bodyPr rtlCol="0" anchor="ctr"/>
-            <a:lstStyle/>
-            <a:p>
-              <a:pPr algn="ctr"/>
-              <a:r>
-                <a:rPr lang="en-US" altLang="zh-CN" sz="2400" b="1" dirty="0">
-                  <a:solidFill>
-                    <a:schemeClr val="bg2"/>
-                  </a:solidFill>
-                  <a:latin typeface="思源宋体 Medium" panose="02020500000000000000" pitchFamily="18" charset="-122"/>
-                  <a:ea typeface="思源宋体 Medium" panose="02020500000000000000" pitchFamily="18" charset="-122"/>
-                  <a:cs typeface="阿里巴巴普惠体 B" panose="00020600040101010101" pitchFamily="18" charset="-122"/>
-                </a:rPr>
-                <a:t>02</a:t>
-              </a:r>
-              <a:endParaRPr lang="zh-CN" altLang="en-US" sz="2400" b="1" dirty="0">
-                <a:solidFill>
-                  <a:schemeClr val="bg2"/>
-                </a:solidFill>
-                <a:latin typeface="思源宋体 Medium" panose="02020500000000000000" pitchFamily="18" charset="-122"/>
-                <a:ea typeface="思源宋体 Medium" panose="02020500000000000000" pitchFamily="18" charset="-122"/>
-                <a:cs typeface="阿里巴巴普惠体 B" panose="00020600040101010101" pitchFamily="18" charset="-122"/>
-              </a:endParaRPr>
-            </a:p>
-          </p:txBody>
-        </p:sp>
-        <p:cxnSp>
-          <p:nvCxnSpPr>
-            <p:cNvPr id="10" name="直接连接符 9"/>
-            <p:cNvCxnSpPr/>
-            <p:nvPr>
-              <p:custDataLst>
-                <p:tags r:id="rId6"/>
-              </p:custDataLst>
-            </p:nvPr>
-          </p:nvCxnSpPr>
-          <p:spPr>
-            <a:xfrm flipV="1">
-              <a:off x="2909622" y="3728972"/>
-              <a:ext cx="1627632" cy="1"/>
-            </a:xfrm>
-            <a:prstGeom prst="line">
-              <a:avLst/>
-            </a:prstGeom>
-            <a:ln>
-              <a:solidFill>
-                <a:schemeClr val="accent1"/>
-              </a:solidFill>
-              <a:tailEnd type="oval"/>
-            </a:ln>
-          </p:spPr>
-          <p:style>
-            <a:lnRef idx="2">
-              <a:schemeClr val="accent1"/>
-            </a:lnRef>
-            <a:fillRef idx="0">
-              <a:schemeClr val="accent1"/>
-            </a:fillRef>
-            <a:effectRef idx="1">
-              <a:schemeClr val="accent1"/>
-            </a:effectRef>
-            <a:fontRef idx="minor">
-              <a:schemeClr val="tx1"/>
-            </a:fontRef>
-          </p:style>
-        </p:cxnSp>
-      </p:grpSp>
-      <p:grpSp>
-        <p:nvGrpSpPr>
-          <p:cNvPr id="11" name="组合 10"/>
-          <p:cNvGrpSpPr/>
-          <p:nvPr>
-            <p:custDataLst>
-              <p:tags r:id="rId7"/>
-            </p:custDataLst>
-          </p:nvPr>
-        </p:nvGrpSpPr>
-        <p:grpSpPr>
-          <a:xfrm>
-            <a:off x="4974404" y="1366389"/>
+            <a:off x="673549" y="1323209"/>
             <a:ext cx="5741581" cy="1236885"/>
             <a:chOff x="5093277" y="1434420"/>
             <a:chExt cx="5741581" cy="1236885"/>
@@ -15396,7 +15299,7 @@
             <p:cNvSpPr txBox="1"/>
             <p:nvPr>
               <p:custDataLst>
-                <p:tags r:id="rId8"/>
+                <p:tags r:id="rId3"/>
               </p:custDataLst>
             </p:nvPr>
           </p:nvSpPr>
@@ -15458,7 +15361,7 @@
             <p:cNvSpPr txBox="1"/>
             <p:nvPr>
               <p:custDataLst>
-                <p:tags r:id="rId9"/>
+                <p:tags r:id="rId4"/>
               </p:custDataLst>
             </p:nvPr>
           </p:nvSpPr>
@@ -15507,7 +15410,73 @@
                   <a:ea typeface="Noto Sans SC" panose="020B0200000000000000" charset="-122"/>
                   <a:cs typeface="Noto Sans SC" panose="020B0200000000000000" charset="-122"/>
                 </a:rPr>
-                <a:t>选取多份需求文档作为测试对象，以规则提取结果为预测集合、人工确认基准为标准集合，统计 TP、FP、FN</a:t>
+                <a:t>选取多份需求文档作为测试对象，以规则提取结果为预测集合、人工确认基准为标准集合，统计 TP、FP、FN（</a:t>
+              </a:r>
+              <a:r>
+                <a:rPr lang="en-US" altLang="zh-CN" sz="1400">
+                  <a:solidFill>
+                    <a:srgbClr val="4B5563"/>
+                  </a:solidFill>
+                  <a:latin typeface="Noto Sans SC" panose="020B0200000000000000" charset="-122"/>
+                  <a:ea typeface="Noto Sans SC" panose="020B0200000000000000" charset="-122"/>
+                  <a:cs typeface="Noto Sans SC" panose="020B0200000000000000" charset="-122"/>
+                </a:rPr>
+                <a:t>TP-</a:t>
+              </a:r>
+              <a:r>
+                <a:rPr lang="zh-CN" altLang="en-US" sz="1400">
+                  <a:solidFill>
+                    <a:srgbClr val="4B5563"/>
+                  </a:solidFill>
+                  <a:latin typeface="Noto Sans SC" panose="020B0200000000000000" charset="-122"/>
+                  <a:ea typeface="Noto Sans SC" panose="020B0200000000000000" charset="-122"/>
+                  <a:cs typeface="Noto Sans SC" panose="020B0200000000000000" charset="-122"/>
+                </a:rPr>
+                <a:t>正确抽取、</a:t>
+              </a:r>
+              <a:r>
+                <a:rPr lang="en-US" altLang="zh-CN" sz="1400">
+                  <a:solidFill>
+                    <a:srgbClr val="4B5563"/>
+                  </a:solidFill>
+                  <a:latin typeface="Noto Sans SC" panose="020B0200000000000000" charset="-122"/>
+                  <a:ea typeface="Noto Sans SC" panose="020B0200000000000000" charset="-122"/>
+                  <a:cs typeface="Noto Sans SC" panose="020B0200000000000000" charset="-122"/>
+                </a:rPr>
+                <a:t>FP-</a:t>
+              </a:r>
+              <a:r>
+                <a:rPr lang="zh-CN" altLang="en-US" sz="1400">
+                  <a:solidFill>
+                    <a:srgbClr val="4B5563"/>
+                  </a:solidFill>
+                  <a:latin typeface="Noto Sans SC" panose="020B0200000000000000" charset="-122"/>
+                  <a:ea typeface="Noto Sans SC" panose="020B0200000000000000" charset="-122"/>
+                  <a:cs typeface="Noto Sans SC" panose="020B0200000000000000" charset="-122"/>
+                </a:rPr>
+                <a:t>多抽、</a:t>
+              </a:r>
+              <a:r>
+                <a:rPr lang="en-US" altLang="zh-CN" sz="1400">
+                  <a:solidFill>
+                    <a:srgbClr val="4B5563"/>
+                  </a:solidFill>
+                  <a:latin typeface="Noto Sans SC" panose="020B0200000000000000" charset="-122"/>
+                  <a:ea typeface="Noto Sans SC" panose="020B0200000000000000" charset="-122"/>
+                  <a:cs typeface="Noto Sans SC" panose="020B0200000000000000" charset="-122"/>
+                </a:rPr>
+                <a:t>FN-</a:t>
+              </a:r>
+              <a:r>
+                <a:rPr lang="zh-CN" altLang="en-US" sz="1400">
+                  <a:solidFill>
+                    <a:srgbClr val="4B5563"/>
+                  </a:solidFill>
+                  <a:latin typeface="Noto Sans SC" panose="020B0200000000000000" charset="-122"/>
+                  <a:ea typeface="Noto Sans SC" panose="020B0200000000000000" charset="-122"/>
+                  <a:cs typeface="Noto Sans SC" panose="020B0200000000000000" charset="-122"/>
+                </a:rPr>
+                <a:t>少抽）</a:t>
               </a:r>
               <a:endParaRPr lang="zh-CN" altLang="en-US" sz="1400">
                 <a:solidFill>
@@ -15527,16 +15496,16 @@
           <p:cNvGrpSpPr/>
           <p:nvPr>
             <p:custDataLst>
-              <p:tags r:id="rId10"/>
+              <p:tags r:id="rId5"/>
             </p:custDataLst>
           </p:nvPr>
         </p:nvGrpSpPr>
         <p:grpSpPr>
           <a:xfrm>
-            <a:off x="4973769" y="4781390"/>
-            <a:ext cx="5741581" cy="1236885"/>
-            <a:chOff x="5093277" y="1434420"/>
-            <a:chExt cx="5741581" cy="1236885"/>
+            <a:off x="672914" y="4060030"/>
+            <a:ext cx="5741581" cy="1168305"/>
+            <a:chOff x="5092642" y="614000"/>
+            <a:chExt cx="5741581" cy="1168305"/>
           </a:xfrm>
         </p:grpSpPr>
         <p:sp>
@@ -15545,13 +15514,13 @@
             <p:cNvSpPr txBox="1"/>
             <p:nvPr>
               <p:custDataLst>
-                <p:tags r:id="rId11"/>
+                <p:tags r:id="rId6"/>
               </p:custDataLst>
             </p:nvPr>
           </p:nvSpPr>
           <p:spPr>
             <a:xfrm flipH="1">
-              <a:off x="5093277" y="1434420"/>
+              <a:off x="5093277" y="614000"/>
               <a:ext cx="3717641" cy="522605"/>
             </a:xfrm>
             <a:prstGeom prst="rect">
@@ -15607,13 +15576,13 @@
             <p:cNvSpPr txBox="1"/>
             <p:nvPr>
               <p:custDataLst>
-                <p:tags r:id="rId12"/>
+                <p:tags r:id="rId7"/>
               </p:custDataLst>
             </p:nvPr>
           </p:nvSpPr>
           <p:spPr>
             <a:xfrm flipH="1">
-              <a:off x="5093277" y="2025510"/>
+              <a:off x="5092642" y="1136510"/>
               <a:ext cx="5741581" cy="645795"/>
             </a:xfrm>
             <a:prstGeom prst="rect">
@@ -15672,277 +15641,144 @@
       </p:grpSp>
       <p:grpSp>
         <p:nvGrpSpPr>
-          <p:cNvPr id="20" name="组合 19"/>
+          <p:cNvPr id="25" name="组合 24"/>
           <p:cNvGrpSpPr/>
           <p:nvPr>
             <p:custDataLst>
-              <p:tags r:id="rId13"/>
+              <p:tags r:id="rId8"/>
             </p:custDataLst>
           </p:nvPr>
         </p:nvGrpSpPr>
         <p:grpSpPr>
-          <a:xfrm>
-            <a:off x="4637839" y="2967442"/>
-            <a:ext cx="6387606" cy="1523067"/>
-            <a:chOff x="4637839" y="2967442"/>
-            <a:chExt cx="6387606" cy="1523067"/>
+          <a:xfrm rot="0">
+            <a:off x="673735" y="2733040"/>
+            <a:ext cx="5741670" cy="1236980"/>
+            <a:chOff x="5092006" y="988537"/>
+            <a:chExt cx="5741581" cy="1236899"/>
           </a:xfrm>
         </p:grpSpPr>
-        <p:grpSp>
-          <p:nvGrpSpPr>
-            <p:cNvPr id="22" name="组合 21"/>
-            <p:cNvGrpSpPr/>
-            <p:nvPr/>
-          </p:nvGrpSpPr>
-          <p:grpSpPr>
-            <a:xfrm>
-              <a:off x="4637839" y="2967442"/>
-              <a:ext cx="6387606" cy="1523065"/>
-              <a:chOff x="4637839" y="2858356"/>
-              <a:chExt cx="6387606" cy="1523065"/>
-            </a:xfrm>
-          </p:grpSpPr>
-          <p:sp>
-            <p:nvSpPr>
-              <p:cNvPr id="24" name="矩形 23"/>
-              <p:cNvSpPr/>
-              <p:nvPr>
-                <p:custDataLst>
-                  <p:tags r:id="rId14"/>
-                </p:custDataLst>
-              </p:nvPr>
-            </p:nvSpPr>
-            <p:spPr>
-              <a:xfrm>
-                <a:off x="4637839" y="2858356"/>
-                <a:ext cx="6387606" cy="1523065"/>
-              </a:xfrm>
-              <a:prstGeom prst="rect">
-                <a:avLst/>
-              </a:prstGeom>
-              <a:solidFill>
-                <a:schemeClr val="accent1">
-                  <a:lumMod val="20000"/>
-                  <a:lumOff val="80000"/>
-                </a:schemeClr>
-              </a:solidFill>
-              <a:ln>
-                <a:noFill/>
-              </a:ln>
-            </p:spPr>
-            <p:style>
-              <a:lnRef idx="2">
-                <a:schemeClr val="accent1">
-                  <a:shade val="15000"/>
-                </a:schemeClr>
-              </a:lnRef>
-              <a:fillRef idx="1">
-                <a:schemeClr val="accent1"/>
-              </a:fillRef>
-              <a:effectRef idx="0">
-                <a:schemeClr val="accent1"/>
-              </a:effectRef>
-              <a:fontRef idx="minor">
-                <a:schemeClr val="lt1"/>
-              </a:fontRef>
-            </p:style>
-            <p:txBody>
-              <a:bodyPr rtlCol="0" anchor="ctr"/>
-              <a:lstStyle/>
-              <a:p>
-                <a:pPr algn="ctr"/>
-                <a:endParaRPr lang="zh-CN" altLang="en-US"/>
-              </a:p>
-            </p:txBody>
-          </p:sp>
-          <p:grpSp>
-            <p:nvGrpSpPr>
-              <p:cNvPr id="25" name="组合 24"/>
-              <p:cNvGrpSpPr/>
-              <p:nvPr/>
-            </p:nvGrpSpPr>
-            <p:grpSpPr>
-              <a:xfrm>
-                <a:off x="4974404" y="2956980"/>
-                <a:ext cx="5741581" cy="1245153"/>
-                <a:chOff x="5093276" y="1398720"/>
-                <a:chExt cx="5741581" cy="1245153"/>
-              </a:xfrm>
-            </p:grpSpPr>
-            <p:sp>
-              <p:nvSpPr>
-                <p:cNvPr id="28" name="文本框 27"/>
-                <p:cNvSpPr txBox="1"/>
-                <p:nvPr>
-                  <p:custDataLst>
-                    <p:tags r:id="rId15"/>
-                  </p:custDataLst>
-                </p:nvPr>
-              </p:nvSpPr>
-              <p:spPr>
-                <a:xfrm flipH="1">
-                  <a:off x="5093276" y="1398720"/>
-                  <a:ext cx="3717641" cy="539141"/>
-                </a:xfrm>
-                <a:prstGeom prst="rect">
-                  <a:avLst/>
-                </a:prstGeom>
-                <a:noFill/>
-              </p:spPr>
-              <p:txBody>
-                <a:bodyPr wrap="square" lIns="0" tIns="0" rIns="0" bIns="0" rtlCol="0" anchor="ctr" anchorCtr="0">
-                  <a:spAutoFit/>
-                </a:bodyPr>
-                <a:lstStyle/>
-                <a:p>
-                  <a:pPr>
-                    <a:lnSpc>
-                      <a:spcPct val="170000"/>
-                    </a:lnSpc>
-                    <a:spcBef>
-                      <a:spcPct val="0"/>
-                    </a:spcBef>
-                    <a:defRPr/>
-                  </a:pPr>
-                  <a:r>
-                    <a:rPr lang="zh-CN" altLang="en-US" sz="2000" b="1" dirty="0">
-                      <a:solidFill>
-                        <a:schemeClr val="accent1"/>
-                      </a:solidFill>
-                      <a:latin typeface="思源宋体 Medium" panose="02020500000000000000" pitchFamily="18" charset="-122"/>
-                      <a:ea typeface="思源宋体 Medium" panose="02020500000000000000" pitchFamily="18" charset="-122"/>
-                      <a:cs typeface="阿里巴巴普惠体 B" panose="00020600040101010101" pitchFamily="18" charset="-122"/>
-                    </a:rPr>
-                    <a:t>核心指标</a:t>
-                  </a:r>
-                  <a:endParaRPr lang="zh-CN" altLang="en-US" sz="2000" b="1" dirty="0">
-                    <a:solidFill>
-                      <a:schemeClr val="accent1"/>
-                    </a:solidFill>
-                    <a:latin typeface="思源宋体 Medium" panose="02020500000000000000" pitchFamily="18" charset="-122"/>
-                    <a:ea typeface="思源宋体 Medium" panose="02020500000000000000" pitchFamily="18" charset="-122"/>
-                    <a:cs typeface="阿里巴巴普惠体 B" panose="00020600040101010101" pitchFamily="18" charset="-122"/>
-                  </a:endParaRPr>
-                </a:p>
-              </p:txBody>
-            </p:sp>
-            <p:sp>
-              <p:nvSpPr>
-                <p:cNvPr id="29" name="文本框 28"/>
-                <p:cNvSpPr txBox="1"/>
-                <p:nvPr>
-                  <p:custDataLst>
-                    <p:tags r:id="rId16"/>
-                  </p:custDataLst>
-                </p:nvPr>
-              </p:nvSpPr>
-              <p:spPr>
-                <a:xfrm flipH="1">
-                  <a:off x="5093276" y="1998078"/>
-                  <a:ext cx="5741581" cy="645795"/>
-                </a:xfrm>
-                <a:prstGeom prst="rect">
-                  <a:avLst/>
-                </a:prstGeom>
-                <a:noFill/>
-              </p:spPr>
-              <p:txBody>
-                <a:bodyPr wrap="square" lIns="0" tIns="0" rIns="0" bIns="0" anchor="t" anchorCtr="0">
-                  <a:spAutoFit/>
-                </a:bodyPr>
-                <a:lstStyle/>
-                <a:p>
-                  <a:pPr algn="just">
-                    <a:lnSpc>
-                      <a:spcPct val="150000"/>
-                    </a:lnSpc>
-                    <a:spcBef>
-                      <a:spcPts val="0"/>
-                    </a:spcBef>
-                    <a:spcAft>
-                      <a:spcPts val="0"/>
-                    </a:spcAft>
-                    <a:buClr>
-                      <a:schemeClr val="tx2">
-                        <a:lumMod val="60000"/>
-                        <a:lumOff val="40000"/>
-                      </a:schemeClr>
-                    </a:buClr>
-                    <a:buSzTx/>
-                    <a:buFontTx/>
-                    <a:defRPr/>
-                  </a:pPr>
-                  <a:r>
-                    <a:rPr lang="zh-CN" altLang="en-US" sz="1400">
-                      <a:solidFill>
-                        <a:srgbClr val="4B5563"/>
-                      </a:solidFill>
-                      <a:latin typeface="Noto Sans SC" panose="020B0200000000000000" charset="-122"/>
-                      <a:ea typeface="Noto Sans SC" panose="020B0200000000000000" charset="-122"/>
-                      <a:cs typeface="Noto Sans SC" panose="020B0200000000000000" charset="-122"/>
-                    </a:rPr>
-                    <a:t>通过 Precision、Recall 和 F1 分数，从提取准确性、需求覆盖程度和综合效果三个角度评价系统表现。</a:t>
-                  </a:r>
-                  <a:endParaRPr lang="zh-CN" altLang="en-US" sz="1400">
-                    <a:solidFill>
-                      <a:srgbClr val="4B5563"/>
-                    </a:solidFill>
-                    <a:latin typeface="Noto Sans SC" panose="020B0200000000000000" charset="-122"/>
-                    <a:ea typeface="Noto Sans SC" panose="020B0200000000000000" charset="-122"/>
-                    <a:cs typeface="Noto Sans SC" panose="020B0200000000000000" charset="-122"/>
-                  </a:endParaRPr>
-                </a:p>
-              </p:txBody>
-            </p:sp>
-          </p:grpSp>
-        </p:grpSp>
         <p:sp>
           <p:nvSpPr>
-            <p:cNvPr id="23" name="矩形 22"/>
-            <p:cNvSpPr/>
+            <p:cNvPr id="28" name="文本框 27"/>
+            <p:cNvSpPr txBox="1"/>
             <p:nvPr>
               <p:custDataLst>
-                <p:tags r:id="rId17"/>
+                <p:tags r:id="rId9"/>
               </p:custDataLst>
             </p:nvPr>
           </p:nvSpPr>
           <p:spPr>
-            <a:xfrm rot="16200000" flipH="1">
-              <a:off x="3912882" y="3692400"/>
-              <a:ext cx="1523067" cy="73152"/>
+            <a:xfrm flipH="1">
+              <a:off x="5092006" y="988537"/>
+              <a:ext cx="3717641" cy="539141"/>
             </a:xfrm>
             <a:prstGeom prst="rect">
               <a:avLst/>
             </a:prstGeom>
-            <a:solidFill>
-              <a:schemeClr val="accent1"/>
-            </a:solidFill>
-            <a:ln>
-              <a:noFill/>
-            </a:ln>
+            <a:noFill/>
           </p:spPr>
-          <p:style>
-            <a:lnRef idx="2">
-              <a:schemeClr val="accent1">
-                <a:shade val="15000"/>
-              </a:schemeClr>
-            </a:lnRef>
-            <a:fillRef idx="1">
-              <a:schemeClr val="accent1"/>
-            </a:fillRef>
-            <a:effectRef idx="0">
-              <a:schemeClr val="accent1"/>
-            </a:effectRef>
-            <a:fontRef idx="minor">
-              <a:schemeClr val="lt1"/>
-            </a:fontRef>
-          </p:style>
           <p:txBody>
-            <a:bodyPr rtlCol="0" anchor="ctr"/>
+            <a:bodyPr wrap="square" lIns="0" tIns="0" rIns="0" bIns="0" rtlCol="0" anchor="ctr" anchorCtr="0">
+              <a:spAutoFit/>
+            </a:bodyPr>
             <a:lstStyle/>
             <a:p>
-              <a:pPr algn="ctr"/>
-              <a:endParaRPr lang="zh-CN" altLang="en-US"/>
+              <a:pPr>
+                <a:lnSpc>
+                  <a:spcPct val="170000"/>
+                </a:lnSpc>
+                <a:spcBef>
+                  <a:spcPct val="0"/>
+                </a:spcBef>
+                <a:defRPr/>
+              </a:pPr>
+              <a:r>
+                <a:rPr lang="zh-CN" altLang="en-US" sz="2000" b="1" dirty="0">
+                  <a:solidFill>
+                    <a:schemeClr val="accent1"/>
+                  </a:solidFill>
+                  <a:latin typeface="思源宋体 Medium" panose="02020500000000000000" pitchFamily="18" charset="-122"/>
+                  <a:ea typeface="思源宋体 Medium" panose="02020500000000000000" pitchFamily="18" charset="-122"/>
+                  <a:cs typeface="阿里巴巴普惠体 B" panose="00020600040101010101" pitchFamily="18" charset="-122"/>
+                </a:rPr>
+                <a:t>核心指标</a:t>
+              </a:r>
+              <a:endParaRPr lang="zh-CN" altLang="en-US" sz="2000" b="1" dirty="0">
+                <a:solidFill>
+                  <a:schemeClr val="accent1"/>
+                </a:solidFill>
+                <a:latin typeface="思源宋体 Medium" panose="02020500000000000000" pitchFamily="18" charset="-122"/>
+                <a:ea typeface="思源宋体 Medium" panose="02020500000000000000" pitchFamily="18" charset="-122"/>
+                <a:cs typeface="阿里巴巴普惠体 B" panose="00020600040101010101" pitchFamily="18" charset="-122"/>
+              </a:endParaRPr>
+            </a:p>
+          </p:txBody>
+        </p:sp>
+        <p:sp>
+          <p:nvSpPr>
+            <p:cNvPr id="29" name="文本框 28"/>
+            <p:cNvSpPr txBox="1"/>
+            <p:nvPr>
+              <p:custDataLst>
+                <p:tags r:id="rId10"/>
+              </p:custDataLst>
+            </p:nvPr>
+          </p:nvSpPr>
+          <p:spPr>
+            <a:xfrm flipH="1">
+              <a:off x="5092006" y="1579641"/>
+              <a:ext cx="5741581" cy="645795"/>
+            </a:xfrm>
+            <a:prstGeom prst="rect">
+              <a:avLst/>
+            </a:prstGeom>
+            <a:noFill/>
+          </p:spPr>
+          <p:txBody>
+            <a:bodyPr wrap="square" lIns="0" tIns="0" rIns="0" bIns="0" anchor="t" anchorCtr="0">
+              <a:spAutoFit/>
+            </a:bodyPr>
+            <a:lstStyle/>
+            <a:p>
+              <a:pPr algn="just">
+                <a:lnSpc>
+                  <a:spcPct val="150000"/>
+                </a:lnSpc>
+                <a:spcBef>
+                  <a:spcPts val="0"/>
+                </a:spcBef>
+                <a:spcAft>
+                  <a:spcPts val="0"/>
+                </a:spcAft>
+                <a:buClr>
+                  <a:schemeClr val="tx2">
+                    <a:lumMod val="60000"/>
+                    <a:lumOff val="40000"/>
+                  </a:schemeClr>
+                </a:buClr>
+                <a:buSzTx/>
+                <a:buFontTx/>
+                <a:defRPr/>
+              </a:pPr>
+              <a:r>
+                <a:rPr lang="zh-CN" altLang="en-US" sz="1400">
+                  <a:solidFill>
+                    <a:srgbClr val="4B5563"/>
+                  </a:solidFill>
+                  <a:latin typeface="Noto Sans SC" panose="020B0200000000000000" charset="-122"/>
+                  <a:ea typeface="Noto Sans SC" panose="020B0200000000000000" charset="-122"/>
+                  <a:cs typeface="Noto Sans SC" panose="020B0200000000000000" charset="-122"/>
+                </a:rPr>
+                <a:t>通过 Precision、Recall 和 F1 分数，从提取准确性、需求覆盖程度和综合效果三个角度评价系统表现。</a:t>
+              </a:r>
+              <a:endParaRPr lang="zh-CN" altLang="en-US" sz="1400">
+                <a:solidFill>
+                  <a:srgbClr val="4B5563"/>
+                </a:solidFill>
+                <a:latin typeface="Noto Sans SC" panose="020B0200000000000000" charset="-122"/>
+                <a:ea typeface="Noto Sans SC" panose="020B0200000000000000" charset="-122"/>
+                <a:cs typeface="Noto Sans SC" panose="020B0200000000000000" charset="-122"/>
+              </a:endParaRPr>
             </a:p>
           </p:txBody>
         </p:sp>
@@ -16049,7 +15885,7 @@
           <p:nvPr/>
         </p:nvPicPr>
         <p:blipFill>
-          <a:blip r:embed="rId18">
+          <a:blip r:embed="rId11">
             <a:alphaModFix amt="60000"/>
             <a:clrChange>
               <a:clrFrom>
@@ -16079,6 +15915,191 @@
           </a:prstGeom>
         </p:spPr>
       </p:pic>
+      <p:sp>
+        <p:nvSpPr>
+          <p:cNvPr id="16" name="文本框 15"/>
+          <p:cNvSpPr txBox="1"/>
+          <p:nvPr/>
+        </p:nvSpPr>
+        <p:spPr>
+          <a:xfrm>
+            <a:off x="6760210" y="2560320"/>
+            <a:ext cx="466090" cy="2290445"/>
+          </a:xfrm>
+          <a:prstGeom prst="rect">
+            <a:avLst/>
+          </a:prstGeom>
+          <a:noFill/>
+        </p:spPr>
+        <p:txBody>
+          <a:bodyPr wrap="square" rtlCol="0">
+            <a:noAutofit/>
+          </a:bodyPr>
+          <a:p>
+            <a:r>
+              <a:rPr lang="zh-CN" altLang="en-US" sz="2000" b="1" dirty="0">
+                <a:solidFill>
+                  <a:schemeClr val="accent1"/>
+                </a:solidFill>
+                <a:latin typeface="思源宋体 Medium" panose="02020500000000000000" pitchFamily="18" charset="-122"/>
+                <a:ea typeface="思源宋体 Medium" panose="02020500000000000000" pitchFamily="18" charset="-122"/>
+                <a:cs typeface="阿里巴巴普惠体 B" panose="00020600040101010101" pitchFamily="18" charset="-122"/>
+              </a:rPr>
+              <a:t>具体数据与结果</a:t>
+            </a:r>
+            <a:endParaRPr lang="zh-CN" altLang="en-US"/>
+          </a:p>
+        </p:txBody>
+      </p:sp>
+      <p:sp>
+        <p:nvSpPr>
+          <p:cNvPr id="17" name="文本框 16"/>
+          <p:cNvSpPr txBox="1"/>
+          <p:nvPr/>
+        </p:nvSpPr>
+        <p:spPr>
+          <a:xfrm>
+            <a:off x="7455535" y="1914525"/>
+            <a:ext cx="4064000" cy="368300"/>
+          </a:xfrm>
+          <a:prstGeom prst="rect">
+            <a:avLst/>
+          </a:prstGeom>
+          <a:noFill/>
+        </p:spPr>
+        <p:txBody>
+          <a:bodyPr wrap="square" rtlCol="0">
+            <a:spAutoFit/>
+          </a:bodyPr>
+          <a:p>
+            <a:endParaRPr lang="zh-CN" altLang="en-US"/>
+          </a:p>
+        </p:txBody>
+      </p:sp>
+      <p:sp>
+        <p:nvSpPr>
+          <p:cNvPr id="32" name="文本框 31"/>
+          <p:cNvSpPr txBox="1"/>
+          <p:nvPr/>
+        </p:nvSpPr>
+        <p:spPr>
+          <a:xfrm>
+            <a:off x="7239000" y="1551940"/>
+            <a:ext cx="4827270" cy="1060450"/>
+          </a:xfrm>
+          <a:prstGeom prst="rect">
+            <a:avLst/>
+          </a:prstGeom>
+        </p:spPr>
+        <p:txBody>
+          <a:bodyPr wrap="square">
+            <a:spAutoFit/>
+          </a:bodyPr>
+          <a:p>
+            <a:pPr algn="just" defTabSz="266700">
+              <a:lnSpc>
+                <a:spcPct val="150000"/>
+              </a:lnSpc>
+            </a:pPr>
+            <a:r>
+              <a:rPr lang="zh-CN" altLang="en-US" sz="1400">
+                <a:solidFill>
+                  <a:srgbClr val="4B5563"/>
+                </a:solidFill>
+                <a:latin typeface="Noto Sans SC" panose="020B0200000000000000" charset="-122"/>
+                <a:ea typeface="Noto Sans SC" panose="020B0200000000000000" charset="-122"/>
+                <a:cs typeface="Noto Sans SC" panose="020B0200000000000000" charset="-122"/>
+              </a:rPr>
+              <a:t>选取3份需求文档，人工基准总共有73条，系统提取的需求有65条，其中TP是63条，FP是2条，FN是10条。计算得到Precision为96.92%，Recall为86.30%，F1为91.30%。</a:t>
+            </a:r>
+            <a:endParaRPr lang="zh-CN" altLang="en-US" sz="1400">
+              <a:solidFill>
+                <a:srgbClr val="4B5563"/>
+              </a:solidFill>
+              <a:latin typeface="Noto Sans SC" panose="020B0200000000000000" charset="-122"/>
+              <a:ea typeface="Noto Sans SC" panose="020B0200000000000000" charset="-122"/>
+              <a:cs typeface="Noto Sans SC" panose="020B0200000000000000" charset="-122"/>
+            </a:endParaRPr>
+          </a:p>
+        </p:txBody>
+      </p:sp>
+      <p:pic>
+        <p:nvPicPr>
+          <p:cNvPr id="35" name="图片 34"/>
+          <p:cNvPicPr>
+            <a:picLocks noChangeAspect="1"/>
+          </p:cNvPicPr>
+          <p:nvPr/>
+        </p:nvPicPr>
+        <p:blipFill>
+          <a:blip r:embed="rId12"/>
+          <a:stretch>
+            <a:fillRect/>
+          </a:stretch>
+        </p:blipFill>
+        <p:spPr>
+          <a:xfrm>
+            <a:off x="7400290" y="2721610"/>
+            <a:ext cx="4467860" cy="2230120"/>
+          </a:xfrm>
+          <a:prstGeom prst="rect">
+            <a:avLst/>
+          </a:prstGeom>
+        </p:spPr>
+      </p:pic>
+      <p:pic>
+        <p:nvPicPr>
+          <p:cNvPr id="2" name="图片 1"/>
+          <p:cNvPicPr>
+            <a:picLocks noChangeAspect="1"/>
+          </p:cNvPicPr>
+          <p:nvPr/>
+        </p:nvPicPr>
+        <p:blipFill>
+          <a:blip r:embed="rId13"/>
+          <a:stretch>
+            <a:fillRect/>
+          </a:stretch>
+        </p:blipFill>
+        <p:spPr>
+          <a:xfrm>
+            <a:off x="8581390" y="5217160"/>
+            <a:ext cx="2143125" cy="1314450"/>
+          </a:xfrm>
+          <a:prstGeom prst="rect">
+            <a:avLst/>
+          </a:prstGeom>
+        </p:spPr>
+      </p:pic>
+      <p:sp>
+        <p:nvSpPr>
+          <p:cNvPr id="3" name="文本框 2"/>
+          <p:cNvSpPr txBox="1"/>
+          <p:nvPr/>
+        </p:nvSpPr>
+        <p:spPr>
+          <a:xfrm>
+            <a:off x="9282430" y="4951730"/>
+            <a:ext cx="4064000" cy="275590"/>
+          </a:xfrm>
+          <a:prstGeom prst="rect">
+            <a:avLst/>
+          </a:prstGeom>
+          <a:noFill/>
+        </p:spPr>
+        <p:txBody>
+          <a:bodyPr wrap="square" rtlCol="0">
+            <a:spAutoFit/>
+          </a:bodyPr>
+          <a:p>
+            <a:r>
+              <a:rPr lang="zh-CN" altLang="en-US" sz="1200"/>
+              <a:t>计算公式</a:t>
+            </a:r>
+            <a:endParaRPr lang="en-US" altLang="zh-CN" sz="1200"/>
+          </a:p>
+        </p:txBody>
+      </p:sp>
     </p:spTree>
   </p:cSld>
   <p:clrMapOvr>
@@ -19733,7 +19754,7 @@
                   <a:ea typeface="Noto Sans SC" panose="020B0200000000000000" charset="-122"/>
                   <a:cs typeface="Noto Sans SC" panose="020B0200000000000000" charset="-122"/>
                 </a:rPr>
-                <a:t>当前系统对复杂文档和隐含需求的识别能力仍有限，影响波及图主要围绕文档、需求点和版本展开。后续可继续扩展 PDF/OCR 解析、Git/Issue 接入、代码与测试追溯，以及更完整的自动化测试。</a:t>
+                <a:t>当前系统对复杂文档和隐含需求的识别能力仍有限，需求变更追溯关系图主要围绕文档节点和需求版本节点展开。后续可继续扩展 PDF/OCR 解析、Git/Issue 接入、代码与测试追溯，以及更完整的自动化测试。</a:t>
               </a:r>
               <a:endParaRPr lang="zh-CN" altLang="en-US" sz="1400">
                 <a:solidFill>
@@ -19874,7 +19895,7 @@
                   <a:ea typeface="Noto Sans SC" panose="020B0200000000000000" charset="-122"/>
                   <a:cs typeface="Noto Sans SC" panose="020B0200000000000000" charset="-122"/>
                 </a:rPr>
-                <a:t>完成了一个文档驱动的软件需求变更管理与可追溯平台，实现了从需求文档上传、规则提取、需求维护、来源证据保存、版本链记录、影响波及图展示，到 AI 评估报告和变更文档导出的完整流程</a:t>
+                <a:t>完成了一个文档驱动的软件需求变更管理与可追溯平台，实现了从需求文档上传、规则提取、需求维护、来源证据保存、版本链记录、需求变更追溯关系图展示，到 AI 评估报告和变更文档导出的完整流程</a:t>
               </a:r>
               <a:endParaRPr lang="zh-CN" altLang="en-US" sz="1400">
                 <a:solidFill>
@@ -20698,8 +20719,8 @@
         </p:nvSpPr>
         <p:spPr>
           <a:xfrm>
-            <a:off x="384048" y="598932"/>
-            <a:ext cx="1015663" cy="5660136"/>
+            <a:off x="384197" y="598932"/>
+            <a:ext cx="1015365" cy="5660136"/>
           </a:xfrm>
           <a:prstGeom prst="rect">
             <a:avLst/>
@@ -20733,7 +20754,7 @@
                 <a:ea typeface="思源宋体 CN Heavy" panose="02020900000000000000" pitchFamily="18" charset="-122"/>
                 <a:cs typeface="阿里巴巴普惠体 H" panose="00020600040101010101" pitchFamily="18" charset="-122"/>
               </a:rPr>
-              <a:t>CONTENTE</a:t>
+              <a:t>CONTENTS</a:t>
             </a:r>
             <a:endParaRPr lang="zh-CN" altLang="en-US" sz="8000" spc="200" dirty="0">
               <a:gradFill flip="none" rotWithShape="1">
@@ -21397,65 +21418,6 @@
           </p:txBody>
         </p:sp>
       </p:grpSp>
-      <p:sp>
-        <p:nvSpPr>
-          <p:cNvPr id="3" name="TextBox 9"/>
-          <p:cNvSpPr txBox="1"/>
-          <p:nvPr/>
-        </p:nvSpPr>
-        <p:spPr>
-          <a:xfrm>
-            <a:off x="0" y="0"/>
-            <a:ext cx="453651" cy="118430"/>
-          </a:xfrm>
-          <a:prstGeom prst="rect">
-            <a:avLst/>
-          </a:prstGeom>
-          <a:noFill/>
-        </p:spPr>
-        <p:txBody>
-          <a:bodyPr wrap="square" rtlCol="0">
-            <a:spAutoFit/>
-          </a:bodyPr>
-          <a:lstStyle/>
-          <a:p>
-            <a:pPr>
-              <a:lnSpc>
-                <a:spcPct val="200000"/>
-              </a:lnSpc>
-            </a:pPr>
-            <a:r>
-              <a:rPr lang="en-US" altLang="zh-CN" sz="100" dirty="0">
-                <a:noFill/>
-                <a:latin typeface="微软雅黑" panose="020B0503020204020204" pitchFamily="34" charset="-122"/>
-                <a:ea typeface="微软雅黑" panose="020B0503020204020204" pitchFamily="34" charset="-122"/>
-              </a:rPr>
-              <a:t>PPT</a:t>
-            </a:r>
-            <a:r>
-              <a:rPr lang="zh-CN" altLang="en-US" sz="100" dirty="0">
-                <a:noFill/>
-                <a:latin typeface="微软雅黑" panose="020B0503020204020204" pitchFamily="34" charset="-122"/>
-                <a:ea typeface="微软雅黑" panose="020B0503020204020204" pitchFamily="34" charset="-122"/>
-              </a:rPr>
-              <a:t>下载 </a:t>
-            </a:r>
-            <a:r>
-              <a:rPr lang="en-US" altLang="zh-CN" sz="100" dirty="0">
-                <a:noFill/>
-                <a:latin typeface="微软雅黑" panose="020B0503020204020204" pitchFamily="34" charset="-122"/>
-                <a:ea typeface="微软雅黑" panose="020B0503020204020204" pitchFamily="34" charset="-122"/>
-              </a:rPr>
-              <a:t>http://www.1ppt.com/xiazai/</a:t>
-            </a:r>
-            <a:endParaRPr lang="en-US" altLang="zh-CN" sz="100" dirty="0">
-              <a:noFill/>
-              <a:latin typeface="微软雅黑" panose="020B0503020204020204" pitchFamily="34" charset="-122"/>
-              <a:ea typeface="微软雅黑" panose="020B0503020204020204" pitchFamily="34" charset="-122"/>
-            </a:endParaRPr>
-          </a:p>
-        </p:txBody>
-      </p:sp>
       <p:grpSp>
         <p:nvGrpSpPr>
           <p:cNvPr id="2" name="组合 1"/>
@@ -23276,6 +23238,42 @@
                   <a:t>来源分散：</a:t>
                 </a:r>
                 <a:r>
+                  <a:rPr lang="zh-CN" altLang="en-US" sz="1400">
+                    <a:solidFill>
+                      <a:srgbClr val="6B7280"/>
+                    </a:solidFill>
+                    <a:latin typeface="Noto Sans SC" panose="020B0200000000000000" charset="-122"/>
+                    <a:ea typeface="Noto Sans SC" panose="020B0200000000000000" charset="-122"/>
+                    <a:cs typeface="Noto Sans SC" panose="020B0200000000000000" charset="-122"/>
+                    <a:sym typeface="Noto Sans SC" panose="020B0200000000000000" charset="-122"/>
+                  </a:rPr>
+                  <a:t>需求常保存在 </a:t>
+                </a:r>
+                <a:r>
+                  <a:rPr lang="en-US" altLang="zh-CN" sz="1400">
+                    <a:solidFill>
+                      <a:srgbClr val="6B7280"/>
+                    </a:solidFill>
+                    <a:latin typeface="Noto Sans SC" panose="020B0200000000000000" charset="-122"/>
+                    <a:ea typeface="Noto Sans SC" panose="020B0200000000000000" charset="-122"/>
+                    <a:cs typeface="Noto Sans SC" panose="020B0200000000000000" charset="-122"/>
+                    <a:sym typeface="Noto Sans SC" panose="020B0200000000000000" charset="-122"/>
+                  </a:rPr>
+                  <a:t>Word </a:t>
+                </a:r>
+                <a:r>
+                  <a:rPr lang="zh-CN" altLang="en-US" sz="1400">
+                    <a:solidFill>
+                      <a:srgbClr val="6B7280"/>
+                    </a:solidFill>
+                    <a:latin typeface="Noto Sans SC" panose="020B0200000000000000" charset="-122"/>
+                    <a:ea typeface="Noto Sans SC" panose="020B0200000000000000" charset="-122"/>
+                    <a:cs typeface="Noto Sans SC" panose="020B0200000000000000" charset="-122"/>
+                    <a:sym typeface="Noto Sans SC" panose="020B0200000000000000" charset="-122"/>
+                  </a:rPr>
+                  <a:t>需求说明书或业务文档中，格式不统一，人工整理难度较高</a:t>
+                </a:r>
+                <a:r>
                   <a:rPr lang="en-US" sz="1400">
                     <a:solidFill>
                       <a:srgbClr val="6B7280"/>
@@ -23285,7 +23283,7 @@
                     <a:cs typeface="Noto Sans SC" panose="020B0200000000000000" charset="-122"/>
                     <a:sym typeface="Noto Sans SC" panose="020B0200000000000000" charset="-122"/>
                   </a:rPr>
-                  <a:t>需求常保存在Word、TXT等非结构化文档中，难以统一。</a:t>
+                  <a:t>。</a:t>
                 </a:r>
                 <a:endParaRPr lang="en-US" sz="1400"/>
               </a:p>
@@ -26744,7 +26742,18 @@
                     <a:ea typeface="思源宋体 Medium" panose="02020500000000000000" pitchFamily="18" charset="-122"/>
                     <a:cs typeface="阿里巴巴普惠体 B" panose="00020600040101010101" pitchFamily="18" charset="-122"/>
                   </a:rPr>
-                  <a:t>前言技术</a:t>
+                  <a:t>前</a:t>
+                </a:r>
+                <a:r>
+                  <a:rPr lang="zh-CN" altLang="en-US" sz="2000" b="1" dirty="0">
+                    <a:solidFill>
+                      <a:schemeClr val="accent1"/>
+                    </a:solidFill>
+                    <a:latin typeface="思源宋体 Medium" panose="02020500000000000000" pitchFamily="18" charset="-122"/>
+                    <a:ea typeface="思源宋体 Medium" panose="02020500000000000000" pitchFamily="18" charset="-122"/>
+                    <a:cs typeface="阿里巴巴普惠体 B" panose="00020600040101010101" pitchFamily="18" charset="-122"/>
+                  </a:rPr>
+                  <a:t>沿技术</a:t>
                 </a:r>
                 <a:r>
                   <a:rPr lang="zh-CN" altLang="en-US" sz="2000" b="1" dirty="0">
@@ -26790,7 +26799,7 @@
               </a:bodyPr>
               <a:lstStyle/>
               <a:p>
-                <a:pPr marL="0" marR="0" lvl="0" indent="0" algn="just" defTabSz="914400" rtl="0" eaLnBrk="1" fontAlgn="auto" latinLnBrk="0" hangingPunct="1">
+                <a:pPr marL="0" marR="0" lvl="0" algn="just" defTabSz="914400" rtl="0" eaLnBrk="1" fontAlgn="auto" latinLnBrk="0" hangingPunct="1">
                   <a:lnSpc>
                     <a:spcPct val="150000"/>
                   </a:lnSpc>
@@ -26801,10 +26810,10 @@
                     <a:spcPts val="0"/>
                   </a:spcAft>
                   <a:buClr>
-                    <a:srgbClr val="3A472E">
+                    <a:schemeClr val="tx2">
                       <a:lumMod val="60000"/>
                       <a:lumOff val="40000"/>
-                    </a:srgbClr>
+                    </a:schemeClr>
                   </a:buClr>
                   <a:buSzTx/>
                   <a:buFontTx/>
@@ -26812,30 +26821,23 @@
                   <a:defRPr/>
                 </a:pPr>
                 <a:r>
-                  <a:rPr lang="zh-CN" altLang="en-US" sz="1400">
+                  <a:rPr kumimoji="0" lang="zh-CN" altLang="en-US" sz="1400" b="0" i="0" u="none" strike="noStrike" kern="1200" cap="none" spc="0" normalizeH="0" baseline="0">
                     <a:solidFill>
                       <a:srgbClr val="4B5563"/>
                     </a:solidFill>
                     <a:latin typeface="Noto Sans SC" panose="020B0200000000000000" charset="-122"/>
                     <a:ea typeface="Noto Sans SC" panose="020B0200000000000000" charset="-122"/>
                     <a:cs typeface="Noto Sans SC" panose="020B0200000000000000" charset="-122"/>
-                    <a:sym typeface="Noto Sans SC" panose="020B0200000000000000" charset="-122"/>
                   </a:rPr>
-                  <a:t>将多智能体协同、知识图谱和大语言模型辅助分析结合到文档驱动的需求管理流程中</a:t>
+                  <a:t>将职责流程编排、关系图谱思想和大语言模型辅助分析结合到文档驱动的需求管理流程中</a:t>
                 </a:r>
-                <a:endParaRPr kumimoji="0" lang="zh-CN" altLang="en-US" sz="1400" b="0" i="0" u="none" strike="noStrike" kern="1200" cap="none" spc="0" normalizeH="0" baseline="0" noProof="0" dirty="0">
-                  <a:ln>
-                    <a:noFill/>
-                  </a:ln>
+                <a:endParaRPr kumimoji="0" lang="zh-CN" altLang="en-US" sz="1400" b="0" i="0" u="none" strike="noStrike" kern="1200" cap="none" spc="0" normalizeH="0" baseline="0">
                   <a:solidFill>
-                    <a:prstClr val="black"/>
+                    <a:srgbClr val="4B5563"/>
                   </a:solidFill>
-                  <a:effectLst/>
-                  <a:uLnTx/>
-                  <a:uFillTx/>
-                  <a:latin typeface="思源宋体 Medium" panose="02020500000000000000" pitchFamily="18" charset="-122"/>
-                  <a:ea typeface="思源宋体 Medium" panose="02020500000000000000" pitchFamily="18" charset="-122"/>
-                  <a:cs typeface="阿里巴巴普惠体" panose="00020600040101010101" pitchFamily="18" charset="-122"/>
+                  <a:latin typeface="Noto Sans SC" panose="020B0200000000000000" charset="-122"/>
+                  <a:ea typeface="Noto Sans SC" panose="020B0200000000000000" charset="-122"/>
+                  <a:cs typeface="Noto Sans SC" panose="020B0200000000000000" charset="-122"/>
                 </a:endParaRPr>
               </a:p>
             </p:txBody>
@@ -27385,8 +27387,8 @@
         </p:nvSpPr>
         <p:spPr>
           <a:xfrm>
-            <a:off x="8096885" y="5274310"/>
-            <a:ext cx="1713230" cy="1323975"/>
+            <a:off x="6713220" y="5363210"/>
+            <a:ext cx="1888490" cy="1263015"/>
           </a:xfrm>
           <a:prstGeom prst="roundRect">
             <a:avLst>
@@ -27440,7 +27442,7 @@
         <p:spPr>
           <a:xfrm>
             <a:off x="9418320" y="4141470"/>
-            <a:ext cx="1805940" cy="1053465"/>
+            <a:ext cx="1861185" cy="1671320"/>
           </a:xfrm>
           <a:prstGeom prst="roundRect">
             <a:avLst>
@@ -28002,7 +28004,7 @@
                 <a:ea typeface="Noto Sans SC" panose="020B0200000000000000" charset="-122"/>
                 <a:cs typeface="Noto Sans SC" panose="020B0200000000000000" charset="-122"/>
               </a:rPr>
-              <a:t>设计并实现一个文档驱动的软件需求变更管理与可追溯平台。系统支持需求文档上传、规则需求提取、需求点维护、版本链记录、影响波及图展示和 AI 评估报告生成，实现需求内容的结构化管理与变更过程追溯</a:t>
+              <a:t>设计并实现一个文档驱动的软件需求变更管理与可追溯平台。系统支持需求文档上传、规则需求提取、需求点维护、版本链记录、需求变更追溯关系图展示和 AI 评估报告生成，实现需求内容的结构化管理与变更过程追溯</a:t>
             </a:r>
             <a:endParaRPr lang="zh-CN" altLang="en-US" sz="1600" dirty="0">
               <a:solidFill>
@@ -29486,7 +29488,7 @@
                   <a:ea typeface="思源宋体 CN Heavy" panose="02020900000000000000" pitchFamily="18" charset="-122"/>
                   <a:cs typeface="阿里巴巴普惠体 B" panose="00020600040101010101" pitchFamily="18" charset="-122"/>
                 </a:rPr>
-                <a:t>影响波及图展示</a:t>
+                <a:t>需求变更追溯关系图展示</a:t>
               </a:r>
               <a:endParaRPr lang="zh-CN" altLang="en-US" sz="1800" dirty="0">
                 <a:solidFill>
@@ -29526,7 +29528,7 @@
                   <a:ea typeface="Noto Sans SC" panose="020B0200000000000000" charset="-122"/>
                   <a:cs typeface="Noto Sans SC" panose="020B0200000000000000" charset="-122"/>
                 </a:rPr>
-                <a:t>基于文档、需求点和版本数据展示来源与演化关系</a:t>
+                <a:t>基于 MySQL 中的文档节点、需求节点和版本数据生成需求变更追溯关系图</a:t>
               </a:r>
               <a:endParaRPr lang="zh-CN" altLang="en-US" sz="1400" dirty="0">
                 <a:solidFill>
@@ -29552,7 +29554,7 @@
         </p:nvGrpSpPr>
         <p:grpSpPr>
           <a:xfrm>
-            <a:off x="7342674" y="5296111"/>
+            <a:off x="5959009" y="5385011"/>
             <a:ext cx="2467610" cy="900430"/>
             <a:chOff x="6016752" y="3584800"/>
             <a:chExt cx="2467610" cy="900430"/>
@@ -29772,30 +29774,6 @@
       </p:sp>
       <p:pic>
         <p:nvPicPr>
-          <p:cNvPr id="262837785" name="图片 1"/>
-          <p:cNvPicPr>
-            <a:picLocks noChangeAspect="1"/>
-          </p:cNvPicPr>
-          <p:nvPr/>
-        </p:nvPicPr>
-        <p:blipFill>
-          <a:blip r:embed="rId24"/>
-          <a:stretch>
-            <a:fillRect/>
-          </a:stretch>
-        </p:blipFill>
-        <p:spPr>
-          <a:xfrm>
-            <a:off x="324485" y="1651000"/>
-            <a:ext cx="5356860" cy="3394075"/>
-          </a:xfrm>
-          <a:prstGeom prst="rect">
-            <a:avLst/>
-          </a:prstGeom>
-        </p:spPr>
-      </p:pic>
-      <p:pic>
-        <p:nvPicPr>
           <p:cNvPr id="28" name="图片 27" descr="校徽(1)"/>
           <p:cNvPicPr>
             <a:picLocks noChangeAspect="1"/>
@@ -29803,7 +29781,7 @@
           <p:nvPr/>
         </p:nvPicPr>
         <p:blipFill>
-          <a:blip r:embed="rId25">
+          <a:blip r:embed="rId24">
             <a:alphaModFix amt="60000"/>
             <a:clrChange>
               <a:clrFrom>
@@ -29831,6 +29809,34 @@
           <a:prstGeom prst="rect">
             <a:avLst/>
           </a:prstGeom>
+        </p:spPr>
+      </p:pic>
+      <p:pic>
+        <p:nvPicPr>
+          <p:cNvPr id="29" name="图片 1"/>
+          <p:cNvPicPr>
+            <a:picLocks noChangeAspect="1"/>
+          </p:cNvPicPr>
+          <p:nvPr/>
+        </p:nvPicPr>
+        <p:blipFill>
+          <a:blip r:embed="rId25"/>
+          <a:stretch>
+            <a:fillRect/>
+          </a:stretch>
+        </p:blipFill>
+        <p:spPr>
+          <a:xfrm>
+            <a:off x="310198" y="1466850"/>
+            <a:ext cx="5398135" cy="3456940"/>
+          </a:xfrm>
+          <a:prstGeom prst="rect">
+            <a:avLst/>
+          </a:prstGeom>
+          <a:noFill/>
+          <a:ln>
+            <a:noFill/>
+          </a:ln>
         </p:spPr>
       </p:pic>
     </p:spTree>
@@ -33441,29 +33447,7 @@
                   <a:ea typeface="思源宋体 Medium" panose="02020500000000000000" pitchFamily="18" charset="-122"/>
                   <a:cs typeface="阿里巴巴普惠体 B" panose="00020600040101010101" pitchFamily="18" charset="-122"/>
                 </a:rPr>
-                <a:t>追溯与</a:t>
-              </a:r>
-              <a:r>
-                <a:rPr lang="zh-CN" altLang="en-US" sz="2000" b="1" dirty="0">
-                  <a:solidFill>
-                    <a:schemeClr val="accent1"/>
-                  </a:solidFill>
-                  <a:latin typeface="思源宋体 Medium" panose="02020500000000000000" pitchFamily="18" charset="-122"/>
-                  <a:ea typeface="思源宋体 Medium" panose="02020500000000000000" pitchFamily="18" charset="-122"/>
-                  <a:cs typeface="阿里巴巴普惠体 B" panose="00020600040101010101" pitchFamily="18" charset="-122"/>
-                </a:rPr>
-                <a:t>影响图</a:t>
-              </a:r>
-              <a:r>
-                <a:rPr lang="zh-CN" altLang="en-US" sz="2000" b="1" dirty="0">
-                  <a:solidFill>
-                    <a:schemeClr val="accent1"/>
-                  </a:solidFill>
-                  <a:latin typeface="思源宋体 Medium" panose="02020500000000000000" pitchFamily="18" charset="-122"/>
-                  <a:ea typeface="思源宋体 Medium" panose="02020500000000000000" pitchFamily="18" charset="-122"/>
-                  <a:cs typeface="阿里巴巴普惠体 B" panose="00020600040101010101" pitchFamily="18" charset="-122"/>
-                </a:rPr>
-                <a:t>展示</a:t>
+                <a:t>追溯关系图展示</a:t>
               </a:r>
               <a:endParaRPr lang="zh-CN" altLang="en-US" sz="2000" b="1" dirty="0">
                 <a:solidFill>
@@ -34465,18 +34449,7 @@
                     <a:ea typeface="思源宋体 Medium" panose="02020500000000000000" pitchFamily="18" charset="-122"/>
                     <a:cs typeface="阿里巴巴普惠体 B" panose="00020600040101010101" pitchFamily="18" charset="-122"/>
                   </a:rPr>
-                  <a:t>影响</a:t>
-                </a:r>
-                <a:r>
-                  <a:rPr lang="zh-CN" altLang="en-US" sz="2000" b="1" dirty="0">
-                    <a:solidFill>
-                      <a:schemeClr val="accent1"/>
-                    </a:solidFill>
-                    <a:latin typeface="思源宋体 Medium" panose="02020500000000000000" pitchFamily="18" charset="-122"/>
-                    <a:ea typeface="思源宋体 Medium" panose="02020500000000000000" pitchFamily="18" charset="-122"/>
-                    <a:cs typeface="阿里巴巴普惠体 B" panose="00020600040101010101" pitchFamily="18" charset="-122"/>
-                  </a:rPr>
-                  <a:t>波及图</a:t>
+                  <a:t>需求变更追溯关系图</a:t>
                 </a:r>
                 <a:endParaRPr lang="zh-CN" altLang="en-US" sz="2000" b="1" dirty="0">
                   <a:solidFill>
@@ -34543,52 +34516,39 @@
                     <a:ea typeface="Noto Sans SC" panose="020B0200000000000000" charset="-122"/>
                     <a:cs typeface="Noto Sans SC" panose="020B0200000000000000" charset="-122"/>
                   </a:rPr>
-                  <a:t>基于文档、需求点和版本记录生成影响波及图，展示需求来源、变更过程和版本演化关系，辅助用户理解需求变化的影响范围</a:t>
+                  <a:t>基于文档、需求点和版本记录生成需求变更追溯关系图，展示需求来源、变更过程和版本演化关系，辅助用户理解需求变化的</a:t>
                 </a:r>
-                <a:endParaRPr lang="zh-CN" altLang="en-US" sz="1400" dirty="0">
+                <a:r>
+                  <a:rPr lang="zh-CN" altLang="en-US" sz="1400">
+                    <a:solidFill>
+                      <a:srgbClr val="4B5563"/>
+                    </a:solidFill>
+                    <a:latin typeface="Noto Sans SC" panose="020B0200000000000000" charset="-122"/>
+                    <a:ea typeface="Noto Sans SC" panose="020B0200000000000000" charset="-122"/>
+                    <a:cs typeface="Noto Sans SC" panose="020B0200000000000000" charset="-122"/>
+                  </a:rPr>
+                  <a:t>过程</a:t>
+                </a:r>
+                <a:endParaRPr lang="zh-CN" altLang="en-US" sz="1400">
                   <a:solidFill>
-                    <a:prstClr val="black"/>
+                    <a:srgbClr val="4B5563"/>
                   </a:solidFill>
-                  <a:latin typeface="思源宋体 Medium" panose="02020500000000000000" pitchFamily="18" charset="-122"/>
-                  <a:ea typeface="思源宋体 Medium" panose="02020500000000000000" pitchFamily="18" charset="-122"/>
-                  <a:cs typeface="阿里巴巴普惠体" panose="00020600040101010101" pitchFamily="18" charset="-122"/>
+                  <a:latin typeface="Noto Sans SC" panose="020B0200000000000000" charset="-122"/>
+                  <a:ea typeface="Noto Sans SC" panose="020B0200000000000000" charset="-122"/>
+                  <a:cs typeface="Noto Sans SC" panose="020B0200000000000000" charset="-122"/>
                 </a:endParaRPr>
               </a:p>
             </p:txBody>
           </p:sp>
         </p:grpSp>
       </p:grpSp>
-      <p:pic>
-        <p:nvPicPr>
-          <p:cNvPr id="2066769943" name="图片 1"/>
-          <p:cNvPicPr>
-            <a:picLocks noChangeAspect="1"/>
-          </p:cNvPicPr>
-          <p:nvPr/>
-        </p:nvPicPr>
-        <p:blipFill>
-          <a:blip r:embed="rId8"/>
-          <a:stretch>
-            <a:fillRect/>
-          </a:stretch>
-        </p:blipFill>
-        <p:spPr>
-          <a:xfrm>
-            <a:off x="5970270" y="1452880"/>
-            <a:ext cx="5174615" cy="3973830"/>
-          </a:xfrm>
-          <a:prstGeom prst="rect">
-            <a:avLst/>
-          </a:prstGeom>
-        </p:spPr>
-      </p:pic>
       <p:sp>
         <p:nvSpPr>
           <p:cNvPr id="3" name="标题 1"/>
           <p:cNvSpPr txBox="1"/>
           <p:nvPr>
             <p:custDataLst>
-              <p:tags r:id="rId9"/>
+              <p:tags r:id="rId8"/>
             </p:custDataLst>
           </p:nvPr>
         </p:nvSpPr>
@@ -34665,7 +34625,7 @@
           <p:nvPr/>
         </p:nvPicPr>
         <p:blipFill>
-          <a:blip r:embed="rId10">
+          <a:blip r:embed="rId9">
             <a:alphaModFix amt="60000"/>
             <a:clrChange>
               <a:clrFrom>
@@ -34693,6 +34653,34 @@
           <a:prstGeom prst="rect">
             <a:avLst/>
           </a:prstGeom>
+        </p:spPr>
+      </p:pic>
+      <p:pic>
+        <p:nvPicPr>
+          <p:cNvPr id="35" name="图片 4"/>
+          <p:cNvPicPr>
+            <a:picLocks noChangeAspect="1"/>
+          </p:cNvPicPr>
+          <p:nvPr/>
+        </p:nvPicPr>
+        <p:blipFill>
+          <a:blip r:embed="rId10"/>
+          <a:stretch>
+            <a:fillRect/>
+          </a:stretch>
+        </p:blipFill>
+        <p:spPr>
+          <a:xfrm>
+            <a:off x="6067425" y="1523365"/>
+            <a:ext cx="4931410" cy="3811270"/>
+          </a:xfrm>
+          <a:prstGeom prst="rect">
+            <a:avLst/>
+          </a:prstGeom>
+          <a:noFill/>
+          <a:ln>
+            <a:noFill/>
+          </a:ln>
         </p:spPr>
       </p:pic>
     </p:spTree>
@@ -35175,8 +35163,8 @@
           </p:nvSpPr>
           <p:spPr>
             <a:xfrm flipH="1">
-              <a:off x="1537478" y="3244438"/>
-              <a:ext cx="1667153" cy="704744"/>
+              <a:off x="1025522" y="3103445"/>
+              <a:ext cx="2651570" cy="986990"/>
             </a:xfrm>
             <a:prstGeom prst="rect">
               <a:avLst/>
@@ -35235,6 +35223,33 @@
                 <a:t>监控智能体</a:t>
               </a:r>
               <a:endParaRPr lang="zh-CN" altLang="en-US" sz="2000" b="1" dirty="0">
+                <a:solidFill>
+                  <a:schemeClr val="accent1"/>
+                </a:solidFill>
+                <a:latin typeface="思源宋体 Medium" panose="02020500000000000000" pitchFamily="18" charset="-122"/>
+                <a:ea typeface="思源宋体 Medium" panose="02020500000000000000" pitchFamily="18" charset="-122"/>
+                <a:cs typeface="阿里巴巴普惠体 B" panose="00020600040101010101" pitchFamily="18" charset="-122"/>
+                <a:sym typeface="Noto Sans SC" panose="020B0200000000000000" charset="-122"/>
+              </a:endParaRPr>
+            </a:p>
+            <a:p>
+              <a:pPr indent="0" algn="ctr">
+                <a:lnSpc>
+                  <a:spcPct val="125000"/>
+                </a:lnSpc>
+              </a:pPr>
+              <a:r>
+                <a:rPr lang="zh-CN" altLang="en-US" sz="1600" b="1" dirty="0">
+                  <a:solidFill>
+                    <a:schemeClr val="accent1"/>
+                  </a:solidFill>
+                  <a:latin typeface="思源宋体 Medium" panose="02020500000000000000" pitchFamily="18" charset="-122"/>
+                  <a:ea typeface="思源宋体 Medium" panose="02020500000000000000" pitchFamily="18" charset="-122"/>
+                  <a:cs typeface="阿里巴巴普惠体 B" panose="00020600040101010101" pitchFamily="18" charset="-122"/>
+                </a:rPr>
+                <a:t>（文档接入职责）</a:t>
+              </a:r>
+              <a:endParaRPr lang="zh-CN" altLang="en-US" sz="1600" b="1" dirty="0">
                 <a:solidFill>
                   <a:schemeClr val="accent1"/>
                 </a:solidFill>
@@ -36076,10 +36091,10 @@
         </p:nvGrpSpPr>
         <p:grpSpPr>
           <a:xfrm>
-            <a:off x="3620770" y="1772920"/>
-            <a:ext cx="2427605" cy="4174490"/>
-            <a:chOff x="861231" y="2185416"/>
-            <a:chExt cx="3019646" cy="3825752"/>
+            <a:off x="3543935" y="1772920"/>
+            <a:ext cx="2573655" cy="4174490"/>
+            <a:chOff x="765658" y="2185416"/>
+            <a:chExt cx="3201314" cy="3825752"/>
           </a:xfrm>
         </p:grpSpPr>
         <p:sp>
@@ -36198,8 +36213,8 @@
           </p:nvSpPr>
           <p:spPr>
             <a:xfrm flipH="1">
-              <a:off x="1537478" y="3244438"/>
-              <a:ext cx="1667153" cy="704744"/>
+              <a:off x="765658" y="3103445"/>
+              <a:ext cx="3201314" cy="986990"/>
             </a:xfrm>
             <a:prstGeom prst="rect">
               <a:avLst/>
@@ -36258,6 +36273,33 @@
                 <a:t>分析智能体</a:t>
               </a:r>
               <a:endParaRPr lang="zh-CN" altLang="en-US" sz="2000" b="1" dirty="0">
+                <a:solidFill>
+                  <a:schemeClr val="accent1"/>
+                </a:solidFill>
+                <a:latin typeface="思源宋体 Medium" panose="02020500000000000000" pitchFamily="18" charset="-122"/>
+                <a:ea typeface="思源宋体 Medium" panose="02020500000000000000" pitchFamily="18" charset="-122"/>
+                <a:cs typeface="阿里巴巴普惠体 B" panose="00020600040101010101" pitchFamily="18" charset="-122"/>
+                <a:sym typeface="Noto Sans SC" panose="020B0200000000000000" charset="-122"/>
+              </a:endParaRPr>
+            </a:p>
+            <a:p>
+              <a:pPr indent="0" algn="ctr">
+                <a:lnSpc>
+                  <a:spcPct val="125000"/>
+                </a:lnSpc>
+              </a:pPr>
+              <a:r>
+                <a:rPr lang="zh-CN" altLang="en-US" sz="1600" b="1" dirty="0">
+                  <a:solidFill>
+                    <a:schemeClr val="accent1"/>
+                  </a:solidFill>
+                  <a:latin typeface="思源宋体 Medium" panose="02020500000000000000" pitchFamily="18" charset="-122"/>
+                  <a:ea typeface="思源宋体 Medium" panose="02020500000000000000" pitchFamily="18" charset="-122"/>
+                  <a:cs typeface="阿里巴巴普惠体 B" panose="00020600040101010101" pitchFamily="18" charset="-122"/>
+                </a:rPr>
+                <a:t>（规则分析职责）</a:t>
+              </a:r>
+              <a:endParaRPr lang="zh-CN" altLang="en-US" sz="1600" b="1" dirty="0">
                 <a:solidFill>
                   <a:schemeClr val="accent1"/>
                 </a:solidFill>
@@ -37099,10 +37141,10 @@
         </p:nvGrpSpPr>
         <p:grpSpPr>
           <a:xfrm>
-            <a:off x="6380480" y="1772920"/>
-            <a:ext cx="2427605" cy="4174490"/>
-            <a:chOff x="861231" y="2185416"/>
-            <a:chExt cx="3019646" cy="3825752"/>
+            <a:off x="6180455" y="1772920"/>
+            <a:ext cx="2836545" cy="4174490"/>
+            <a:chOff x="612424" y="2185416"/>
+            <a:chExt cx="3528318" cy="3825752"/>
           </a:xfrm>
         </p:grpSpPr>
         <p:sp>
@@ -37221,8 +37263,8 @@
           </p:nvSpPr>
           <p:spPr>
             <a:xfrm flipH="1">
-              <a:off x="1537478" y="3244438"/>
-              <a:ext cx="1667153" cy="704744"/>
+              <a:off x="612424" y="3103445"/>
+              <a:ext cx="3528318" cy="986990"/>
             </a:xfrm>
             <a:prstGeom prst="rect">
               <a:avLst/>
@@ -37281,6 +37323,55 @@
                 <a:t>维护智能体</a:t>
               </a:r>
               <a:endParaRPr lang="zh-CN" altLang="en-US" sz="2000" b="1" dirty="0">
+                <a:solidFill>
+                  <a:schemeClr val="accent1"/>
+                </a:solidFill>
+                <a:latin typeface="思源宋体 Medium" panose="02020500000000000000" pitchFamily="18" charset="-122"/>
+                <a:ea typeface="思源宋体 Medium" panose="02020500000000000000" pitchFamily="18" charset="-122"/>
+                <a:cs typeface="阿里巴巴普惠体 B" panose="00020600040101010101" pitchFamily="18" charset="-122"/>
+                <a:sym typeface="Noto Sans SC" panose="020B0200000000000000" charset="-122"/>
+              </a:endParaRPr>
+            </a:p>
+            <a:p>
+              <a:pPr indent="0" algn="ctr">
+                <a:lnSpc>
+                  <a:spcPct val="125000"/>
+                </a:lnSpc>
+              </a:pPr>
+              <a:r>
+                <a:rPr lang="en-US" altLang="zh-CN" sz="1600" b="1" dirty="0">
+                  <a:solidFill>
+                    <a:schemeClr val="accent1"/>
+                  </a:solidFill>
+                  <a:latin typeface="思源宋体 Medium" panose="02020500000000000000" pitchFamily="18" charset="-122"/>
+                  <a:ea typeface="思源宋体 Medium" panose="02020500000000000000" pitchFamily="18" charset="-122"/>
+                  <a:cs typeface="阿里巴巴普惠体 B" panose="00020600040101010101" pitchFamily="18" charset="-122"/>
+                </a:rPr>
+                <a:t>(</a:t>
+              </a:r>
+              <a:r>
+                <a:rPr lang="zh-CN" altLang="en-US" sz="1600" b="1" dirty="0">
+                  <a:solidFill>
+                    <a:schemeClr val="accent1"/>
+                  </a:solidFill>
+                  <a:latin typeface="思源宋体 Medium" panose="02020500000000000000" pitchFamily="18" charset="-122"/>
+                  <a:ea typeface="思源宋体 Medium" panose="02020500000000000000" pitchFamily="18" charset="-122"/>
+                  <a:cs typeface="阿里巴巴普惠体 B" panose="00020600040101010101" pitchFamily="18" charset="-122"/>
+                </a:rPr>
+                <a:t>证据与版本维护职责</a:t>
+              </a:r>
+              <a:r>
+                <a:rPr lang="en-US" altLang="zh-CN" sz="1600" b="1" dirty="0">
+                  <a:solidFill>
+                    <a:schemeClr val="accent1"/>
+                  </a:solidFill>
+                  <a:latin typeface="思源宋体 Medium" panose="02020500000000000000" pitchFamily="18" charset="-122"/>
+                  <a:ea typeface="思源宋体 Medium" panose="02020500000000000000" pitchFamily="18" charset="-122"/>
+                  <a:cs typeface="阿里巴巴普惠体 B" panose="00020600040101010101" pitchFamily="18" charset="-122"/>
+                </a:rPr>
+                <a:t>)</a:t>
+              </a:r>
+              <a:endParaRPr lang="en-US" altLang="zh-CN" sz="1600" b="1" dirty="0">
                 <a:solidFill>
                   <a:schemeClr val="accent1"/>
                 </a:solidFill>
@@ -38122,9 +38213,9 @@
         </p:nvGrpSpPr>
         <p:grpSpPr>
           <a:xfrm>
-            <a:off x="9140190" y="1772920"/>
+            <a:off x="9149080" y="1772920"/>
             <a:ext cx="2427605" cy="4174490"/>
-            <a:chOff x="861231" y="2185416"/>
+            <a:chOff x="872289" y="2185416"/>
             <a:chExt cx="3019646" cy="3825752"/>
           </a:xfrm>
         </p:grpSpPr>
@@ -38140,7 +38231,7 @@
           </p:nvSpPr>
           <p:spPr>
             <a:xfrm>
-              <a:off x="861231" y="2185416"/>
+              <a:off x="872289" y="2185416"/>
               <a:ext cx="3019646" cy="3825752"/>
             </a:xfrm>
             <a:prstGeom prst="roundRect">
@@ -38244,8 +38335,8 @@
           </p:nvSpPr>
           <p:spPr>
             <a:xfrm flipH="1">
-              <a:off x="1537478" y="3244438"/>
-              <a:ext cx="1667153" cy="704744"/>
+              <a:off x="1053957" y="3103445"/>
+              <a:ext cx="2651570" cy="986990"/>
             </a:xfrm>
             <a:prstGeom prst="rect">
               <a:avLst/>
@@ -38304,6 +38395,55 @@
                 <a:t>评估智能体</a:t>
               </a:r>
               <a:endParaRPr lang="zh-CN" altLang="en-US" sz="2000" b="1" dirty="0">
+                <a:solidFill>
+                  <a:schemeClr val="accent1"/>
+                </a:solidFill>
+                <a:latin typeface="思源宋体 Medium" panose="02020500000000000000" pitchFamily="18" charset="-122"/>
+                <a:ea typeface="思源宋体 Medium" panose="02020500000000000000" pitchFamily="18" charset="-122"/>
+                <a:cs typeface="阿里巴巴普惠体 B" panose="00020600040101010101" pitchFamily="18" charset="-122"/>
+                <a:sym typeface="Noto Sans SC" panose="020B0200000000000000" charset="-122"/>
+              </a:endParaRPr>
+            </a:p>
+            <a:p>
+              <a:pPr indent="0" algn="ctr">
+                <a:lnSpc>
+                  <a:spcPct val="125000"/>
+                </a:lnSpc>
+              </a:pPr>
+              <a:r>
+                <a:rPr lang="en-US" altLang="zh-CN" sz="1600" b="1" dirty="0">
+                  <a:solidFill>
+                    <a:schemeClr val="accent1"/>
+                  </a:solidFill>
+                  <a:latin typeface="思源宋体 Medium" panose="02020500000000000000" pitchFamily="18" charset="-122"/>
+                  <a:ea typeface="思源宋体 Medium" panose="02020500000000000000" pitchFamily="18" charset="-122"/>
+                  <a:cs typeface="阿里巴巴普惠体 B" panose="00020600040101010101" pitchFamily="18" charset="-122"/>
+                </a:rPr>
+                <a:t>(</a:t>
+              </a:r>
+              <a:r>
+                <a:rPr lang="zh-CN" altLang="en-US" sz="1600" b="1" dirty="0">
+                  <a:solidFill>
+                    <a:schemeClr val="accent1"/>
+                  </a:solidFill>
+                  <a:latin typeface="思源宋体 Medium" panose="02020500000000000000" pitchFamily="18" charset="-122"/>
+                  <a:ea typeface="思源宋体 Medium" panose="02020500000000000000" pitchFamily="18" charset="-122"/>
+                  <a:cs typeface="阿里巴巴普惠体 B" panose="00020600040101010101" pitchFamily="18" charset="-122"/>
+                </a:rPr>
+                <a:t>评估验证职责</a:t>
+              </a:r>
+              <a:r>
+                <a:rPr lang="en-US" altLang="zh-CN" sz="1600" b="1" dirty="0">
+                  <a:solidFill>
+                    <a:schemeClr val="accent1"/>
+                  </a:solidFill>
+                  <a:latin typeface="思源宋体 Medium" panose="02020500000000000000" pitchFamily="18" charset="-122"/>
+                  <a:ea typeface="思源宋体 Medium" panose="02020500000000000000" pitchFamily="18" charset="-122"/>
+                  <a:cs typeface="阿里巴巴普惠体 B" panose="00020600040101010101" pitchFamily="18" charset="-122"/>
+                </a:rPr>
+                <a:t>)</a:t>
+              </a:r>
+              <a:endParaRPr lang="en-US" altLang="zh-CN" sz="1600" b="1" dirty="0">
                 <a:solidFill>
                   <a:schemeClr val="accent1"/>
                 </a:solidFill>
@@ -39143,7 +39283,7 @@
         <p:spPr>
           <a:xfrm>
             <a:off x="425450" y="107315"/>
-            <a:ext cx="5113655" cy="307340"/>
+            <a:ext cx="5734685" cy="307340"/>
           </a:xfrm>
           <a:prstGeom prst="rect">
             <a:avLst/>
@@ -39157,17 +39297,6 @@
           <a:lstStyle/>
           <a:p>
             <a:r>
-              <a:rPr lang="en-US" altLang="zh-CN" sz="2000" dirty="0">
-                <a:solidFill>
-                  <a:schemeClr val="accent4"/>
-                </a:solidFill>
-                <a:latin typeface="思源宋体 CN Heavy" panose="02020900000000000000" pitchFamily="18" charset="-122"/>
-                <a:ea typeface="思源宋体 CN Heavy" panose="02020900000000000000" pitchFamily="18" charset="-122"/>
-                <a:cs typeface="阿里巴巴普惠体 R" panose="00020600040101010101" pitchFamily="18" charset="-122"/>
-              </a:rPr>
-              <a:t>02</a:t>
-            </a:r>
-            <a:r>
               <a:rPr lang="zh-CN" altLang="en-US" sz="2000" dirty="0">
                 <a:solidFill>
                   <a:schemeClr val="accent4"/>
@@ -39177,43 +39306,7 @@
                 <a:cs typeface="阿里巴巴普惠体 R" panose="00020600040101010101" pitchFamily="18" charset="-122"/>
                 <a:sym typeface="+mn-ea"/>
               </a:rPr>
-              <a:t>相关理论与关键技术</a:t>
-            </a:r>
-            <a:r>
-              <a:rPr lang="en-US" altLang="zh-CN" sz="2000" dirty="0">
-                <a:solidFill>
-                  <a:schemeClr val="accent4"/>
-                </a:solidFill>
-                <a:latin typeface="思源宋体 CN Heavy" panose="02020900000000000000" pitchFamily="18" charset="-122"/>
-                <a:ea typeface="思源宋体 CN Heavy" panose="02020900000000000000" pitchFamily="18" charset="-122"/>
-                <a:cs typeface="阿里巴巴普惠体 R" panose="00020600040101010101" pitchFamily="18" charset="-122"/>
-                <a:sym typeface="+mn-ea"/>
-              </a:rPr>
-              <a:t>—</a:t>
-            </a:r>
-            <a:r>
-              <a:rPr lang="zh-CN" altLang="en-US" sz="2000" dirty="0">
-                <a:solidFill>
-                  <a:schemeClr val="accent4"/>
-                </a:solidFill>
-                <a:latin typeface="思源宋体 CN Heavy" panose="02020900000000000000" pitchFamily="18" charset="-122"/>
-                <a:ea typeface="思源宋体 CN Heavy" panose="02020900000000000000" pitchFamily="18" charset="-122"/>
-                <a:cs typeface="阿里巴巴普惠体 R" panose="00020600040101010101" pitchFamily="18" charset="-122"/>
-                <a:sym typeface="+mn-ea"/>
-              </a:rPr>
-              <a:t>多智能体</a:t>
-            </a:r>
-            <a:r>
-              <a:rPr lang="zh-CN" altLang="en-US" sz="2000" dirty="0">
-                <a:solidFill>
-                  <a:schemeClr val="accent4"/>
-                </a:solidFill>
-                <a:latin typeface="思源宋体 CN Heavy" panose="02020900000000000000" pitchFamily="18" charset="-122"/>
-                <a:ea typeface="思源宋体 CN Heavy" panose="02020900000000000000" pitchFamily="18" charset="-122"/>
-                <a:cs typeface="阿里巴巴普惠体 R" panose="00020600040101010101" pitchFamily="18" charset="-122"/>
-                <a:sym typeface="+mn-ea"/>
-              </a:rPr>
-              <a:t>协同思想</a:t>
+              <a:t>02相关理论与关键技术—职责划分与流程编排思想</a:t>
             </a:r>
             <a:endParaRPr lang="zh-CN" altLang="en-US" sz="2000" dirty="0">
               <a:solidFill>
@@ -39866,7 +39959,7 @@
                   <a:ea typeface="Noto Sans SC" panose="020B0200000000000000" charset="-122"/>
                   <a:cs typeface="Noto Sans SC" panose="020B0200000000000000" charset="-122"/>
                 </a:rPr>
-                <a:t>中的文档、需求点和版本数据生成影响波及图，展示需求来源、变更过程和版本演化关系。</a:t>
+                <a:t>中的文档、需求点和版本数据生成需求变更追溯关系图，展示需求来源、变更过程和版本演化关系。</a:t>
               </a:r>
               <a:endParaRPr lang="zh-CN" altLang="en-US" sz="1400">
                 <a:solidFill>
@@ -40216,7 +40309,7 @@
                   <a:ea typeface="Noto Sans SC" panose="020B0200000000000000" charset="-122"/>
                   <a:cs typeface="Noto Sans SC" panose="020B0200000000000000" charset="-122"/>
                 </a:rPr>
-                <a:t>应用方式：引用</a:t>
+                <a:t>应用方式：调用 </a:t>
               </a:r>
               <a:r>
                 <a:rPr lang="en-US" altLang="zh-CN" sz="1400">
@@ -40238,7 +40331,7 @@
                   <a:ea typeface="Noto Sans SC" panose="020B0200000000000000" charset="-122"/>
                   <a:cs typeface="Noto Sans SC" panose="020B0200000000000000" charset="-122"/>
                 </a:rPr>
-                <a:t>对文档进行总结性分析和基准对比后</a:t>
+                <a:t>对文档内容和评估结果进行总结性分析</a:t>
               </a:r>
               <a:r>
                 <a:rPr lang="zh-CN" altLang="en-US" sz="1400">
@@ -40249,7 +40342,7 @@
                   <a:ea typeface="Noto Sans SC" panose="020B0200000000000000" charset="-122"/>
                   <a:cs typeface="Noto Sans SC" panose="020B0200000000000000" charset="-122"/>
                 </a:rPr>
-                <a:t>的评估说明，</a:t>
+                <a:t>，</a:t>
               </a:r>
               <a:endParaRPr lang="zh-CN" altLang="en-US" sz="1400">
                 <a:solidFill>
@@ -41281,43 +41374,43 @@
 
 <file path=ppt/tags/tag233.xml><?xml version="1.0" encoding="utf-8"?>
 <p:tagLst xmlns:p="http://schemas.openxmlformats.org/presentationml/2006/main">
-  <p:tag name="KSO_WM_DIAGRAM_VIRTUALLY_FRAME" val="{&quot;height&quot;:376.44023622047246,&quot;left&quot;:91.85472440944882,&quot;top&quot;:107.58968503937008,&quot;width&quot;:776.2905511811023}"/>
+  <p:tag name="KSO_WM_DIAGRAM_VIRTUALLY_FRAME" val="{&quot;height&quot;:380.47102362204726,&quot;left&quot;:67.8,&quot;top&quot;:110.42897637795275,&quot;width&quot;:843.05}"/>
 </p:tagLst>
 </file>
 
 <file path=ppt/tags/tag234.xml><?xml version="1.0" encoding="utf-8"?>
 <p:tagLst xmlns:p="http://schemas.openxmlformats.org/presentationml/2006/main">
-  <p:tag name="KSO_WM_DIAGRAM_VIRTUALLY_FRAME" val="{&quot;height&quot;:376.44023622047246,&quot;left&quot;:91.85472440944882,&quot;top&quot;:107.58968503937008,&quot;width&quot;:776.2905511811023}"/>
+  <p:tag name="KSO_WM_DIAGRAM_VIRTUALLY_FRAME" val="{&quot;height&quot;:379.8402362204725,&quot;left&quot;:52.93535433070865,&quot;top&quot;:104.18968503937008,&quot;width&quot;:815.2099212598425}"/>
 </p:tagLst>
 </file>
 
 <file path=ppt/tags/tag235.xml><?xml version="1.0" encoding="utf-8"?>
 <p:tagLst xmlns:p="http://schemas.openxmlformats.org/presentationml/2006/main">
-  <p:tag name="KSO_WM_DIAGRAM_VIRTUALLY_FRAME" val="{&quot;height&quot;:376.44023622047246,&quot;left&quot;:91.85472440944882,&quot;top&quot;:107.58968503937008,&quot;width&quot;:776.2905511811023}"/>
+  <p:tag name="KSO_WM_DIAGRAM_VIRTUALLY_FRAME" val="{&quot;height&quot;:379.8402362204725,&quot;left&quot;:52.93535433070865,&quot;top&quot;:104.18968503937008,&quot;width&quot;:815.2099212598425}"/>
 </p:tagLst>
 </file>
 
 <file path=ppt/tags/tag236.xml><?xml version="1.0" encoding="utf-8"?>
 <p:tagLst xmlns:p="http://schemas.openxmlformats.org/presentationml/2006/main">
-  <p:tag name="KSO_WM_DIAGRAM_VIRTUALLY_FRAME" val="{&quot;height&quot;:376.44023622047246,&quot;left&quot;:91.85472440944882,&quot;top&quot;:107.58968503937008,&quot;width&quot;:776.2905511811023}"/>
+  <p:tag name="KSO_WM_DIAGRAM_VIRTUALLY_FRAME" val="{&quot;height&quot;:379.8402362204725,&quot;left&quot;:52.93535433070865,&quot;top&quot;:104.18968503937008,&quot;width&quot;:815.2099212598425}"/>
 </p:tagLst>
 </file>
 
 <file path=ppt/tags/tag237.xml><?xml version="1.0" encoding="utf-8"?>
 <p:tagLst xmlns:p="http://schemas.openxmlformats.org/presentationml/2006/main">
-  <p:tag name="KSO_WM_DIAGRAM_VIRTUALLY_FRAME" val="{&quot;height&quot;:376.44023622047246,&quot;left&quot;:91.85472440944882,&quot;top&quot;:107.58968503937008,&quot;width&quot;:776.2905511811023}"/>
+  <p:tag name="KSO_WM_DIAGRAM_VIRTUALLY_FRAME" val="{&quot;height&quot;:379.8402362204725,&quot;left&quot;:52.93535433070865,&quot;top&quot;:104.18968503937008,&quot;width&quot;:815.2099212598425}"/>
 </p:tagLst>
 </file>
 
 <file path=ppt/tags/tag238.xml><?xml version="1.0" encoding="utf-8"?>
 <p:tagLst xmlns:p="http://schemas.openxmlformats.org/presentationml/2006/main">
-  <p:tag name="KSO_WM_DIAGRAM_VIRTUALLY_FRAME" val="{&quot;height&quot;:376.44023622047246,&quot;left&quot;:91.85472440944882,&quot;top&quot;:107.58968503937008,&quot;width&quot;:776.2905511811023}"/>
+  <p:tag name="KSO_WM_DIAGRAM_VIRTUALLY_FRAME" val="{&quot;height&quot;:379.8402362204725,&quot;left&quot;:52.93535433070865,&quot;top&quot;:104.18968503937008,&quot;width&quot;:815.2099212598425}"/>
 </p:tagLst>
 </file>
 
 <file path=ppt/tags/tag239.xml><?xml version="1.0" encoding="utf-8"?>
 <p:tagLst xmlns:p="http://schemas.openxmlformats.org/presentationml/2006/main">
-  <p:tag name="KSO_WM_DIAGRAM_VIRTUALLY_FRAME" val="{&quot;height&quot;:376.44023622047246,&quot;left&quot;:91.85472440944882,&quot;top&quot;:107.58968503937008,&quot;width&quot;:776.2905511811023}"/>
+  <p:tag name="KSO_WM_DIAGRAM_VIRTUALLY_FRAME" val="{&quot;height&quot;:379.8402362204725,&quot;left&quot;:52.93535433070865,&quot;top&quot;:104.18968503937008,&quot;width&quot;:815.2099212598425}"/>
 </p:tagLst>
 </file>
 
@@ -41329,61 +41422,61 @@
 
 <file path=ppt/tags/tag240.xml><?xml version="1.0" encoding="utf-8"?>
 <p:tagLst xmlns:p="http://schemas.openxmlformats.org/presentationml/2006/main">
-  <p:tag name="KSO_WM_DIAGRAM_VIRTUALLY_FRAME" val="{&quot;height&quot;:376.44023622047246,&quot;left&quot;:91.85472440944882,&quot;top&quot;:107.58968503937008,&quot;width&quot;:776.2905511811023}"/>
+  <p:tag name="KSO_WM_DIAGRAM_VIRTUALLY_FRAME" val="{&quot;height&quot;:379.8402362204725,&quot;left&quot;:52.93535433070865,&quot;top&quot;:104.18968503937008,&quot;width&quot;:815.2099212598425}"/>
 </p:tagLst>
 </file>
 
 <file path=ppt/tags/tag241.xml><?xml version="1.0" encoding="utf-8"?>
 <p:tagLst xmlns:p="http://schemas.openxmlformats.org/presentationml/2006/main">
-  <p:tag name="KSO_WM_DIAGRAM_VIRTUALLY_FRAME" val="{&quot;height&quot;:376.44023622047246,&quot;left&quot;:91.85472440944882,&quot;top&quot;:107.58968503937008,&quot;width&quot;:776.2905511811023}"/>
+  <p:tag name="KSO_WM_DIAGRAM_VIRTUALLY_FRAME" val="{&quot;height&quot;:379.8402362204725,&quot;left&quot;:52.93535433070865,&quot;top&quot;:104.18968503937008,&quot;width&quot;:815.2099212598425}"/>
 </p:tagLst>
 </file>
 
 <file path=ppt/tags/tag242.xml><?xml version="1.0" encoding="utf-8"?>
 <p:tagLst xmlns:p="http://schemas.openxmlformats.org/presentationml/2006/main">
-  <p:tag name="KSO_WM_DIAGRAM_VIRTUALLY_FRAME" val="{&quot;height&quot;:376.44023622047246,&quot;left&quot;:91.85472440944882,&quot;top&quot;:107.58968503937008,&quot;width&quot;:776.2905511811023}"/>
+  <p:tag name="KSO_WM_DIAGRAM_VIRTUALLY_FRAME" val="{&quot;height&quot;:379.8402362204725,&quot;left&quot;:52.93535433070865,&quot;top&quot;:104.18968503937008,&quot;width&quot;:815.2099212598425}"/>
 </p:tagLst>
 </file>
 
 <file path=ppt/tags/tag243.xml><?xml version="1.0" encoding="utf-8"?>
 <p:tagLst xmlns:p="http://schemas.openxmlformats.org/presentationml/2006/main">
-  <p:tag name="KSO_WM_DIAGRAM_VIRTUALLY_FRAME" val="{&quot;height&quot;:376.44023622047246,&quot;left&quot;:91.85472440944882,&quot;top&quot;:107.58968503937008,&quot;width&quot;:776.2905511811023}"/>
+  <p:tag name="KSO_WM_DIAGRAM_VIRTUALLY_FRAME" val="{&quot;height&quot;:379.8277165354331,&quot;left&quot;:66.98503937007874,&quot;top&quot;:111.2727559055118,&quot;width&quot;:826.0299212598424}"/>
 </p:tagLst>
 </file>
 
 <file path=ppt/tags/tag244.xml><?xml version="1.0" encoding="utf-8"?>
 <p:tagLst xmlns:p="http://schemas.openxmlformats.org/presentationml/2006/main">
-  <p:tag name="KSO_WM_DIAGRAM_VIRTUALLY_FRAME" val="{&quot;height&quot;:376.44023622047246,&quot;left&quot;:91.85472440944882,&quot;top&quot;:107.58968503937008,&quot;width&quot;:776.2905511811023}"/>
+  <p:tag name="KSO_WM_DIAGRAM_VIRTUALLY_FRAME" val="{&quot;height&quot;:379.8277165354331,&quot;left&quot;:66.98503937007874,&quot;top&quot;:111.2727559055118,&quot;width&quot;:826.0299212598424}"/>
 </p:tagLst>
 </file>
 
 <file path=ppt/tags/tag245.xml><?xml version="1.0" encoding="utf-8"?>
 <p:tagLst xmlns:p="http://schemas.openxmlformats.org/presentationml/2006/main">
-  <p:tag name="KSO_WM_DIAGRAM_VIRTUALLY_FRAME" val="{&quot;height&quot;:376.44023622047246,&quot;left&quot;:91.85472440944882,&quot;top&quot;:107.58968503937008,&quot;width&quot;:776.2905511811023}"/>
+  <p:tag name="KSO_WM_DIAGRAM_VIRTUALLY_FRAME" val="{&quot;height&quot;:379.8277165354331,&quot;left&quot;:66.98503937007874,&quot;top&quot;:111.2727559055118,&quot;width&quot;:826.0299212598424}"/>
 </p:tagLst>
 </file>
 
 <file path=ppt/tags/tag246.xml><?xml version="1.0" encoding="utf-8"?>
 <p:tagLst xmlns:p="http://schemas.openxmlformats.org/presentationml/2006/main">
-  <p:tag name="KSO_WM_DIAGRAM_VIRTUALLY_FRAME" val="{&quot;height&quot;:376.44023622047246,&quot;left&quot;:91.85472440944882,&quot;top&quot;:107.58968503937008,&quot;width&quot;:776.2905511811023}"/>
+  <p:tag name="KSO_WM_DIAGRAM_VIRTUALLY_FRAME" val="{&quot;height&quot;:379.82771653543307,&quot;left&quot;:66.98503937007874,&quot;top&quot;:111.2727559055118,&quot;width&quot;:826.0299212598424}"/>
 </p:tagLst>
 </file>
 
 <file path=ppt/tags/tag247.xml><?xml version="1.0" encoding="utf-8"?>
 <p:tagLst xmlns:p="http://schemas.openxmlformats.org/presentationml/2006/main">
-  <p:tag name="KSO_WM_DIAGRAM_VIRTUALLY_FRAME" val="{&quot;height&quot;:376.44023622047246,&quot;left&quot;:91.85472440944882,&quot;top&quot;:107.58968503937008,&quot;width&quot;:776.2905511811023}"/>
+  <p:tag name="KSO_WM_DIAGRAM_VIRTUALLY_FRAME" val="{&quot;height&quot;:379.8277165354331,&quot;left&quot;:66.98503937007874,&quot;top&quot;:111.2727559055118,&quot;width&quot;:826.0299212598424}"/>
 </p:tagLst>
 </file>
 
 <file path=ppt/tags/tag248.xml><?xml version="1.0" encoding="utf-8"?>
 <p:tagLst xmlns:p="http://schemas.openxmlformats.org/presentationml/2006/main">
-  <p:tag name="KSO_WM_DIAGRAM_VIRTUALLY_FRAME" val="{&quot;height&quot;:376.44023622047246,&quot;left&quot;:91.85472440944882,&quot;top&quot;:107.58968503937008,&quot;width&quot;:776.2905511811023}"/>
+  <p:tag name="KSO_WM_DIAGRAM_VIRTUALLY_FRAME" val="{&quot;height&quot;:379.8277165354331,&quot;left&quot;:66.98503937007874,&quot;top&quot;:111.2727559055118,&quot;width&quot;:826.0299212598424}"/>
 </p:tagLst>
 </file>
 
 <file path=ppt/tags/tag249.xml><?xml version="1.0" encoding="utf-8"?>
 <p:tagLst xmlns:p="http://schemas.openxmlformats.org/presentationml/2006/main">
-  <p:tag name="KSO_WM_DIAGRAM_VIRTUALLY_FRAME" val="{&quot;height&quot;:376.44023622047246,&quot;left&quot;:91.85472440944882,&quot;top&quot;:107.58968503937008,&quot;width&quot;:776.2905511811023}"/>
+  <p:tag name="KSO_WM_DIAGRAM_VIRTUALLY_FRAME" val="{&quot;height&quot;:379.82771653543307,&quot;left&quot;:66.98503937007874,&quot;top&quot;:111.2727559055118,&quot;width&quot;:826.0299212598424}"/>
 </p:tagLst>
 </file>
 
@@ -41407,13 +41500,13 @@
 
 <file path=ppt/tags/tag252.xml><?xml version="1.0" encoding="utf-8"?>
 <p:tagLst xmlns:p="http://schemas.openxmlformats.org/presentationml/2006/main">
-  <p:tag name="KSO_WM_DIAGRAM_VIRTUALLY_FRAME" val="{&quot;height&quot;:379.8277165354331,&quot;left&quot;:66.98503937007874,&quot;top&quot;:111.2727559055118,&quot;width&quot;:826.0299212598424}"/>
+  <p:tag name="KSO_WM_DIAGRAM_VIRTUALLY_FRAME" val="{&quot;height&quot;:379.82771653543307,&quot;left&quot;:66.98503937007874,&quot;top&quot;:111.2727559055118,&quot;width&quot;:826.0299212598424}"/>
 </p:tagLst>
 </file>
 
 <file path=ppt/tags/tag253.xml><?xml version="1.0" encoding="utf-8"?>
 <p:tagLst xmlns:p="http://schemas.openxmlformats.org/presentationml/2006/main">
-  <p:tag name="KSO_WM_DIAGRAM_VIRTUALLY_FRAME" val="{&quot;height&quot;:379.82771653543307,&quot;left&quot;:66.98503937007874,&quot;top&quot;:111.2727559055118,&quot;width&quot;:826.0299212598424}"/>
+  <p:tag name="KSO_WM_DIAGRAM_VIRTUALLY_FRAME" val="{&quot;height&quot;:379.8277165354331,&quot;left&quot;:66.98503937007874,&quot;top&quot;:111.2727559055118,&quot;width&quot;:826.0299212598424}"/>
 </p:tagLst>
 </file>
 
@@ -41425,13 +41518,13 @@
 
 <file path=ppt/tags/tag255.xml><?xml version="1.0" encoding="utf-8"?>
 <p:tagLst xmlns:p="http://schemas.openxmlformats.org/presentationml/2006/main">
-  <p:tag name="KSO_WM_DIAGRAM_VIRTUALLY_FRAME" val="{&quot;height&quot;:379.8277165354331,&quot;left&quot;:66.98503937007874,&quot;top&quot;:111.2727559055118,&quot;width&quot;:826.0299212598424}"/>
+  <p:tag name="KSO_WM_DIAGRAM_VIRTUALLY_FRAME" val="{&quot;height&quot;:379.82771653543307,&quot;left&quot;:66.98503937007874,&quot;top&quot;:111.2727559055118,&quot;width&quot;:826.0299212598424}"/>
 </p:tagLst>
 </file>
 
 <file path=ppt/tags/tag256.xml><?xml version="1.0" encoding="utf-8"?>
 <p:tagLst xmlns:p="http://schemas.openxmlformats.org/presentationml/2006/main">
-  <p:tag name="KSO_WM_DIAGRAM_VIRTUALLY_FRAME" val="{&quot;height&quot;:379.82771653543307,&quot;left&quot;:66.98503937007874,&quot;top&quot;:111.2727559055118,&quot;width&quot;:826.0299212598424}"/>
+  <p:tag name="KSO_WM_DIAGRAM_VIRTUALLY_FRAME" val="{&quot;height&quot;:379.8277165354331,&quot;left&quot;:66.98503937007874,&quot;top&quot;:111.2727559055118,&quot;width&quot;:826.0299212598424}"/>
 </p:tagLst>
 </file>
 
@@ -41443,13 +41536,13 @@
 
 <file path=ppt/tags/tag258.xml><?xml version="1.0" encoding="utf-8"?>
 <p:tagLst xmlns:p="http://schemas.openxmlformats.org/presentationml/2006/main">
-  <p:tag name="KSO_WM_DIAGRAM_VIRTUALLY_FRAME" val="{&quot;height&quot;:379.8277165354331,&quot;left&quot;:66.98503937007874,&quot;top&quot;:111.2727559055118,&quot;width&quot;:826.0299212598424}"/>
+  <p:tag name="KSO_WM_DIAGRAM_VIRTUALLY_FRAME" val="{&quot;height&quot;:379.82771653543307,&quot;left&quot;:66.98503937007874,&quot;top&quot;:111.2727559055118,&quot;width&quot;:826.0299212598424}"/>
 </p:tagLst>
 </file>
 
 <file path=ppt/tags/tag259.xml><?xml version="1.0" encoding="utf-8"?>
 <p:tagLst xmlns:p="http://schemas.openxmlformats.org/presentationml/2006/main">
-  <p:tag name="KSO_WM_DIAGRAM_VIRTUALLY_FRAME" val="{&quot;height&quot;:379.82771653543307,&quot;left&quot;:66.98503937007874,&quot;top&quot;:111.2727559055118,&quot;width&quot;:826.0299212598424}"/>
+  <p:tag name="KSO_WM_DIAGRAM_VIRTUALLY_FRAME" val="{&quot;height&quot;:379.8277165354331,&quot;left&quot;:66.98503937007874,&quot;top&quot;:111.2727559055118,&quot;width&quot;:826.0299212598424}"/>
 </p:tagLst>
 </file>
 
@@ -41467,13 +41560,13 @@
 
 <file path=ppt/tags/tag261.xml><?xml version="1.0" encoding="utf-8"?>
 <p:tagLst xmlns:p="http://schemas.openxmlformats.org/presentationml/2006/main">
-  <p:tag name="KSO_WM_DIAGRAM_VIRTUALLY_FRAME" val="{&quot;height&quot;:379.8277165354331,&quot;left&quot;:66.98503937007874,&quot;top&quot;:111.2727559055118,&quot;width&quot;:826.0299212598424}"/>
+  <p:tag name="KSO_WM_DIAGRAM_VIRTUALLY_FRAME" val="{&quot;height&quot;:379.82771653543307,&quot;left&quot;:66.98503937007874,&quot;top&quot;:111.2727559055118,&quot;width&quot;:826.0299212598424}"/>
 </p:tagLst>
 </file>
 
 <file path=ppt/tags/tag262.xml><?xml version="1.0" encoding="utf-8"?>
 <p:tagLst xmlns:p="http://schemas.openxmlformats.org/presentationml/2006/main">
-  <p:tag name="KSO_WM_DIAGRAM_VIRTUALLY_FRAME" val="{&quot;height&quot;:379.82771653543307,&quot;left&quot;:66.98503937007874,&quot;top&quot;:111.2727559055118,&quot;width&quot;:826.0299212598424}"/>
+  <p:tag name="KSO_WM_DIAGRAM_VIRTUALLY_FRAME" val="{&quot;height&quot;:379.8277165354331,&quot;left&quot;:66.98503937007874,&quot;top&quot;:111.2727559055118,&quot;width&quot;:826.0299212598424}"/>
 </p:tagLst>
 </file>
 
@@ -41483,51 +41576,9 @@
 </p:tagLst>
 </file>
 
-<file path=ppt/tags/tag264.xml><?xml version="1.0" encoding="utf-8"?>
-<p:tagLst xmlns:p="http://schemas.openxmlformats.org/presentationml/2006/main">
-  <p:tag name="KSO_WM_DIAGRAM_VIRTUALLY_FRAME" val="{&quot;height&quot;:379.8277165354331,&quot;left&quot;:66.98503937007874,&quot;top&quot;:111.2727559055118,&quot;width&quot;:826.0299212598424}"/>
-</p:tagLst>
-</file>
-
-<file path=ppt/tags/tag265.xml><?xml version="1.0" encoding="utf-8"?>
-<p:tagLst xmlns:p="http://schemas.openxmlformats.org/presentationml/2006/main">
-  <p:tag name="KSO_WM_DIAGRAM_VIRTUALLY_FRAME" val="{&quot;height&quot;:379.82771653543307,&quot;left&quot;:66.98503937007874,&quot;top&quot;:111.2727559055118,&quot;width&quot;:826.0299212598424}"/>
-</p:tagLst>
-</file>
-
-<file path=ppt/tags/tag266.xml><?xml version="1.0" encoding="utf-8"?>
-<p:tagLst xmlns:p="http://schemas.openxmlformats.org/presentationml/2006/main">
-  <p:tag name="KSO_WM_DIAGRAM_VIRTUALLY_FRAME" val="{&quot;height&quot;:379.8277165354331,&quot;left&quot;:66.98503937007874,&quot;top&quot;:111.2727559055118,&quot;width&quot;:826.0299212598424}"/>
-</p:tagLst>
-</file>
-
-<file path=ppt/tags/tag267.xml><?xml version="1.0" encoding="utf-8"?>
-<p:tagLst xmlns:p="http://schemas.openxmlformats.org/presentationml/2006/main">
-  <p:tag name="KSO_WM_DIAGRAM_VIRTUALLY_FRAME" val="{&quot;height&quot;:379.8277165354331,&quot;left&quot;:66.98503937007874,&quot;top&quot;:111.2727559055118,&quot;width&quot;:826.0299212598424}"/>
-</p:tagLst>
-</file>
-
-<file path=ppt/tags/tag268.xml><?xml version="1.0" encoding="utf-8"?>
-<p:tagLst xmlns:p="http://schemas.openxmlformats.org/presentationml/2006/main">
-  <p:tag name="KSO_WM_DIAGRAM_VIRTUALLY_FRAME" val="{&quot;height&quot;:379.82771653543307,&quot;left&quot;:66.98503937007874,&quot;top&quot;:111.2727559055118,&quot;width&quot;:826.0299212598424}"/>
-</p:tagLst>
-</file>
-
-<file path=ppt/tags/tag269.xml><?xml version="1.0" encoding="utf-8"?>
-<p:tagLst xmlns:p="http://schemas.openxmlformats.org/presentationml/2006/main">
-  <p:tag name="KSO_WM_DIAGRAM_VIRTUALLY_FRAME" val="{&quot;height&quot;:379.8277165354331,&quot;left&quot;:66.98503937007874,&quot;top&quot;:111.2727559055118,&quot;width&quot;:826.0299212598424}"/>
-</p:tagLst>
-</file>
-
 <file path=ppt/tags/tag27.xml><?xml version="1.0" encoding="utf-8"?>
 <p:tagLst xmlns:p="http://schemas.openxmlformats.org/presentationml/2006/main">
   <p:tag name="KSO_WM_DIAGRAM_VIRTUALLY_FRAME" val="{&quot;height&quot;:346.89826771653543,&quot;left&quot;:48.22157480314961,&quot;top&quot;:124.33377952755909,&quot;width&quot;:863.5568503937008}"/>
-</p:tagLst>
-</file>
-
-<file path=ppt/tags/tag270.xml><?xml version="1.0" encoding="utf-8"?>
-<p:tagLst xmlns:p="http://schemas.openxmlformats.org/presentationml/2006/main">
-  <p:tag name="KSO_WM_DIAGRAM_VIRTUALLY_FRAME" val="{&quot;height&quot;:379.8277165354331,&quot;left&quot;:66.98503937007874,&quot;top&quot;:111.2727559055118,&quot;width&quot;:826.0299212598424}"/>
 </p:tagLst>
 </file>
 
@@ -42006,7 +42057,7 @@
 </file>
 
 <file path=ppt/theme/theme1.xml><?xml version="1.0" encoding="utf-8"?>
-<a:theme xmlns:a="http://schemas.openxmlformats.org/drawingml/2006/main" name="第一PPT，www.1ppt.com">
+<a:theme xmlns:a="http://schemas.openxmlformats.org/drawingml/2006/main" name="毕业答辩">
   <a:themeElements>
     <a:clrScheme name="自定义 99">
       <a:dk1>
@@ -42832,6 +42883,265 @@
 </a:theme>
 </file>
 
+<file path=ppt/theme/theme4.xml><?xml version="1.0" encoding="utf-8"?>
+<a:theme xmlns:a="http://schemas.openxmlformats.org/drawingml/2006/main" name="Office 主题">
+  <a:themeElements>
+    <a:clrScheme name="Office">
+      <a:dk1>
+        <a:sysClr val="windowText" lastClr="000000"/>
+      </a:dk1>
+      <a:lt1>
+        <a:sysClr val="window" lastClr="FFFFFF"/>
+      </a:lt1>
+      <a:dk2>
+        <a:srgbClr val="44546A"/>
+      </a:dk2>
+      <a:lt2>
+        <a:srgbClr val="E7E6E6"/>
+      </a:lt2>
+      <a:accent1>
+        <a:srgbClr val="5B9BD5"/>
+      </a:accent1>
+      <a:accent2>
+        <a:srgbClr val="ED7D31"/>
+      </a:accent2>
+      <a:accent3>
+        <a:srgbClr val="A5A5A5"/>
+      </a:accent3>
+      <a:accent4>
+        <a:srgbClr val="FFC000"/>
+      </a:accent4>
+      <a:accent5>
+        <a:srgbClr val="4472C4"/>
+      </a:accent5>
+      <a:accent6>
+        <a:srgbClr val="70AD47"/>
+      </a:accent6>
+      <a:hlink>
+        <a:srgbClr val="0563C1"/>
+      </a:hlink>
+      <a:folHlink>
+        <a:srgbClr val="954F72"/>
+      </a:folHlink>
+    </a:clrScheme>
+    <a:fontScheme name="Office">
+      <a:majorFont>
+        <a:latin typeface="Calibri Light"/>
+        <a:ea typeface=""/>
+        <a:cs typeface=""/>
+        <a:font script="Jpan" typeface="ＭＳ Ｐゴシック"/>
+        <a:font script="Hang" typeface="맑은 고딕"/>
+        <a:font script="Hans" typeface="宋体"/>
+        <a:font script="Hant" typeface="新細明體"/>
+        <a:font script="Arab" typeface="Times New Roman"/>
+        <a:font script="Hebr" typeface="Times New Roman"/>
+        <a:font script="Thai" typeface="Angsana New"/>
+        <a:font script="Ethi" typeface="Nyala"/>
+        <a:font script="Beng" typeface="Vrinda"/>
+        <a:font script="Gujr" typeface="Shruti"/>
+        <a:font script="Khmr" typeface="MoolBoran"/>
+        <a:font script="Knda" typeface="Tunga"/>
+        <a:font script="Guru" typeface="Raavi"/>
+        <a:font script="Cans" typeface="Euphemia"/>
+        <a:font script="Cher" typeface="Plantagenet Cherokee"/>
+        <a:font script="Yiii" typeface="Microsoft Yi Baiti"/>
+        <a:font script="Tibt" typeface="Microsoft Himalaya"/>
+        <a:font script="Thaa" typeface="MV Boli"/>
+        <a:font script="Deva" typeface="Mangal"/>
+        <a:font script="Telu" typeface="Gautami"/>
+        <a:font script="Taml" typeface="Latha"/>
+        <a:font script="Syrc" typeface="Estrangelo Edessa"/>
+        <a:font script="Orya" typeface="Kalinga"/>
+        <a:font script="Mlym" typeface="Kartika"/>
+        <a:font script="Laoo" typeface="DokChampa"/>
+        <a:font script="Sinh" typeface="Iskoola Pota"/>
+        <a:font script="Mong" typeface="Mongolian Baiti"/>
+        <a:font script="Viet" typeface="Times New Roman"/>
+        <a:font script="Uigh" typeface="Microsoft Uighur"/>
+        <a:font script="Geor" typeface="Sylfaen"/>
+      </a:majorFont>
+      <a:minorFont>
+        <a:latin typeface="Calibri"/>
+        <a:ea typeface=""/>
+        <a:cs typeface=""/>
+        <a:font script="Jpan" typeface="ＭＳ Ｐゴシック"/>
+        <a:font script="Hang" typeface="맑은 고딕"/>
+        <a:font script="Hans" typeface="宋体"/>
+        <a:font script="Hant" typeface="新細明體"/>
+        <a:font script="Arab" typeface="Arial"/>
+        <a:font script="Hebr" typeface="Arial"/>
+        <a:font script="Thai" typeface="Cordia New"/>
+        <a:font script="Ethi" typeface="Nyala"/>
+        <a:font script="Beng" typeface="Vrinda"/>
+        <a:font script="Gujr" typeface="Shruti"/>
+        <a:font script="Khmr" typeface="DaunPenh"/>
+        <a:font script="Knda" typeface="Tunga"/>
+        <a:font script="Guru" typeface="Raavi"/>
+        <a:font script="Cans" typeface="Euphemia"/>
+        <a:font script="Cher" typeface="Plantagenet Cherokee"/>
+        <a:font script="Yiii" typeface="Microsoft Yi Baiti"/>
+        <a:font script="Tibt" typeface="Microsoft Himalaya"/>
+        <a:font script="Thaa" typeface="MV Boli"/>
+        <a:font script="Deva" typeface="Mangal"/>
+        <a:font script="Telu" typeface="Gautami"/>
+        <a:font script="Taml" typeface="Latha"/>
+        <a:font script="Syrc" typeface="Estrangelo Edessa"/>
+        <a:font script="Orya" typeface="Kalinga"/>
+        <a:font script="Mlym" typeface="Kartika"/>
+        <a:font script="Laoo" typeface="DokChampa"/>
+        <a:font script="Sinh" typeface="Iskoola Pota"/>
+        <a:font script="Mong" typeface="Mongolian Baiti"/>
+        <a:font script="Viet" typeface="Arial"/>
+        <a:font script="Uigh" typeface="Microsoft Uighur"/>
+        <a:font script="Geor" typeface="Sylfaen"/>
+      </a:minorFont>
+    </a:fontScheme>
+    <a:fmtScheme name="Office">
+      <a:fillStyleLst>
+        <a:solidFill>
+          <a:schemeClr val="phClr"/>
+        </a:solidFill>
+        <a:gradFill rotWithShape="1">
+          <a:gsLst>
+            <a:gs pos="0">
+              <a:schemeClr val="phClr">
+                <a:lumMod val="110000"/>
+                <a:satMod val="105000"/>
+                <a:tint val="67000"/>
+              </a:schemeClr>
+            </a:gs>
+            <a:gs pos="50000">
+              <a:schemeClr val="phClr">
+                <a:lumMod val="105000"/>
+                <a:satMod val="103000"/>
+                <a:tint val="73000"/>
+              </a:schemeClr>
+            </a:gs>
+            <a:gs pos="100000">
+              <a:schemeClr val="phClr">
+                <a:lumMod val="105000"/>
+                <a:satMod val="109000"/>
+                <a:tint val="81000"/>
+              </a:schemeClr>
+            </a:gs>
+          </a:gsLst>
+          <a:lin ang="5400000" scaled="0"/>
+        </a:gradFill>
+        <a:gradFill rotWithShape="1">
+          <a:gsLst>
+            <a:gs pos="0">
+              <a:schemeClr val="phClr">
+                <a:satMod val="103000"/>
+                <a:lumMod val="102000"/>
+                <a:tint val="94000"/>
+              </a:schemeClr>
+            </a:gs>
+            <a:gs pos="50000">
+              <a:schemeClr val="phClr">
+                <a:satMod val="110000"/>
+                <a:lumMod val="100000"/>
+                <a:shade val="100000"/>
+              </a:schemeClr>
+            </a:gs>
+            <a:gs pos="100000">
+              <a:schemeClr val="phClr">
+                <a:lumMod val="99000"/>
+                <a:satMod val="120000"/>
+                <a:shade val="78000"/>
+              </a:schemeClr>
+            </a:gs>
+          </a:gsLst>
+          <a:lin ang="5400000" scaled="0"/>
+        </a:gradFill>
+      </a:fillStyleLst>
+      <a:lnStyleLst>
+        <a:ln w="6350" cap="flat" cmpd="sng" algn="ctr">
+          <a:solidFill>
+            <a:schemeClr val="phClr"/>
+          </a:solidFill>
+          <a:prstDash val="solid"/>
+          <a:miter lim="800000"/>
+        </a:ln>
+        <a:ln w="12700" cap="flat" cmpd="sng" algn="ctr">
+          <a:solidFill>
+            <a:schemeClr val="phClr"/>
+          </a:solidFill>
+          <a:prstDash val="solid"/>
+          <a:miter lim="800000"/>
+        </a:ln>
+        <a:ln w="19050" cap="flat" cmpd="sng" algn="ctr">
+          <a:solidFill>
+            <a:schemeClr val="phClr"/>
+          </a:solidFill>
+          <a:prstDash val="solid"/>
+          <a:miter lim="800000"/>
+        </a:ln>
+      </a:lnStyleLst>
+      <a:effectStyleLst>
+        <a:effectStyle>
+          <a:effectLst/>
+        </a:effectStyle>
+        <a:effectStyle>
+          <a:effectLst/>
+        </a:effectStyle>
+        <a:effectStyle>
+          <a:effectLst>
+            <a:outerShdw blurRad="57150" dist="19050" dir="5400000" algn="ctr" rotWithShape="0">
+              <a:srgbClr val="000000">
+                <a:alpha val="63000"/>
+              </a:srgbClr>
+            </a:outerShdw>
+          </a:effectLst>
+        </a:effectStyle>
+      </a:effectStyleLst>
+      <a:bgFillStyleLst>
+        <a:solidFill>
+          <a:schemeClr val="phClr"/>
+        </a:solidFill>
+        <a:solidFill>
+          <a:schemeClr val="phClr">
+            <a:tint val="95000"/>
+            <a:satMod val="170000"/>
+          </a:schemeClr>
+        </a:solidFill>
+        <a:gradFill rotWithShape="1">
+          <a:gsLst>
+            <a:gs pos="0">
+              <a:schemeClr val="phClr">
+                <a:tint val="93000"/>
+                <a:satMod val="150000"/>
+                <a:shade val="98000"/>
+                <a:lumMod val="102000"/>
+              </a:schemeClr>
+            </a:gs>
+            <a:gs pos="50000">
+              <a:schemeClr val="phClr">
+                <a:tint val="98000"/>
+                <a:satMod val="130000"/>
+                <a:shade val="90000"/>
+                <a:lumMod val="103000"/>
+              </a:schemeClr>
+            </a:gs>
+            <a:gs pos="100000">
+              <a:schemeClr val="phClr">
+                <a:shade val="63000"/>
+                <a:satMod val="120000"/>
+              </a:schemeClr>
+            </a:gs>
+          </a:gsLst>
+          <a:lin ang="5400000" scaled="0"/>
+        </a:gradFill>
+      </a:bgFillStyleLst>
+    </a:fmtScheme>
+  </a:themeElements>
+  <a:extLst>
+    <a:ext uri="{05A4C25C-085E-4340-85A3-A5531E510DB2}">
+      <thm15:themeFamily xmlns:thm15="http://schemas.microsoft.com/office/thememl/2012/main" name="Office Theme" id="{62F939B6-93AF-4DB8-9C6B-D6C7DFDC589F}" vid="{4A3C46E8-61CC-4603-A589-7422A47A8E4A}"/>
+    </a:ext>
+  </a:extLst>
+</a:theme>
+</file>
+
 <file path=ppt/theme/themeOverride1.xml><?xml version="1.0" encoding="utf-8"?>
 <a:themeOverride xmlns:a="http://schemas.openxmlformats.org/drawingml/2006/main">
   <a:clrScheme name="自定义 99">
